--- a/submission/NEE/figures_SI/FigS4.pptx
+++ b/submission/NEE/figures_SI/FigS4.pptx
@@ -2944,7 +2944,7 @@
         <p:spPr>
           <a:xfrm>
             <a:off x="5829120" y="703440"/>
-            <a:ext cx="505800" cy="884880"/>
+            <a:ext cx="505800" cy="885240"/>
           </a:xfrm>
           <a:custGeom>
             <a:avLst/>
@@ -2952,7 +2952,7 @@
             <a:ahLst/>
             <a:rect l="0" t="0" r="r" b="b"/>
             <a:pathLst>
-              <a:path w="1405" h="2458">
+              <a:path w="1405" h="2459">
                 <a:moveTo>
                   <a:pt x="0" y="0"/>
                 </a:moveTo>
@@ -2960,10 +2960,10 @@
                   <a:pt x="1405" y="0"/>
                 </a:lnTo>
                 <a:lnTo>
-                  <a:pt x="1405" y="2458"/>
-                </a:lnTo>
-                <a:lnTo>
-                  <a:pt x="0" y="2458"/>
+                  <a:pt x="1405" y="2459"/>
+                </a:lnTo>
+                <a:lnTo>
+                  <a:pt x="0" y="2459"/>
                 </a:lnTo>
                 <a:lnTo>
                   <a:pt x="0" y="0"/>
@@ -3003,8 +3003,8 @@
         </p:nvSpPr>
         <p:spPr>
           <a:xfrm>
-            <a:off x="5829120" y="1587960"/>
-            <a:ext cx="505800" cy="1053360"/>
+            <a:off x="5829120" y="1588320"/>
+            <a:ext cx="505800" cy="1053000"/>
           </a:xfrm>
           <a:custGeom>
             <a:avLst/>
@@ -3012,7 +3012,7 @@
             <a:ahLst/>
             <a:rect l="0" t="0" r="r" b="b"/>
             <a:pathLst>
-              <a:path w="1405" h="2926">
+              <a:path w="1405" h="2925">
                 <a:moveTo>
                   <a:pt x="0" y="0"/>
                 </a:moveTo>
@@ -3020,10 +3020,10 @@
                   <a:pt x="1405" y="0"/>
                 </a:lnTo>
                 <a:lnTo>
-                  <a:pt x="1405" y="2926"/>
-                </a:lnTo>
-                <a:lnTo>
-                  <a:pt x="0" y="2926"/>
+                  <a:pt x="1405" y="2925"/>
+                </a:lnTo>
+                <a:lnTo>
+                  <a:pt x="0" y="2925"/>
                 </a:lnTo>
                 <a:lnTo>
                   <a:pt x="0" y="0"/>
@@ -3064,7 +3064,7 @@
         <p:spPr>
           <a:xfrm>
             <a:off x="4145040" y="703440"/>
-            <a:ext cx="505440" cy="1172520"/>
+            <a:ext cx="505440" cy="1172880"/>
           </a:xfrm>
           <a:custGeom>
             <a:avLst/>
@@ -3072,7 +3072,7 @@
             <a:ahLst/>
             <a:rect l="0" t="0" r="r" b="b"/>
             <a:pathLst>
-              <a:path w="1404" h="3257">
+              <a:path w="1404" h="3258">
                 <a:moveTo>
                   <a:pt x="0" y="0"/>
                 </a:moveTo>
@@ -3080,10 +3080,10 @@
                   <a:pt x="1404" y="0"/>
                 </a:lnTo>
                 <a:lnTo>
-                  <a:pt x="1404" y="3257"/>
-                </a:lnTo>
-                <a:lnTo>
-                  <a:pt x="0" y="3257"/>
+                  <a:pt x="1404" y="3258"/>
+                </a:lnTo>
+                <a:lnTo>
+                  <a:pt x="0" y="3258"/>
                 </a:lnTo>
                 <a:lnTo>
                   <a:pt x="0" y="0"/>
@@ -3123,8 +3123,8 @@
         </p:nvSpPr>
         <p:spPr>
           <a:xfrm>
-            <a:off x="4145040" y="1875600"/>
-            <a:ext cx="505440" cy="765720"/>
+            <a:off x="4145040" y="1875960"/>
+            <a:ext cx="505440" cy="765360"/>
           </a:xfrm>
           <a:custGeom>
             <a:avLst/>
@@ -3132,7 +3132,7 @@
             <a:ahLst/>
             <a:rect l="0" t="0" r="r" b="b"/>
             <a:pathLst>
-              <a:path w="1404" h="2127">
+              <a:path w="1404" h="2126">
                 <a:moveTo>
                   <a:pt x="0" y="0"/>
                 </a:moveTo>
@@ -3140,10 +3140,10 @@
                   <a:pt x="1404" y="0"/>
                 </a:lnTo>
                 <a:lnTo>
-                  <a:pt x="1404" y="2127"/>
-                </a:lnTo>
-                <a:lnTo>
-                  <a:pt x="0" y="2127"/>
+                  <a:pt x="1404" y="2126"/>
+                </a:lnTo>
+                <a:lnTo>
+                  <a:pt x="0" y="2126"/>
                 </a:lnTo>
                 <a:lnTo>
                   <a:pt x="0" y="0"/>
@@ -3399,7 +3399,7 @@
         </p:nvSpPr>
         <p:spPr>
           <a:xfrm>
-            <a:off x="5973840" y="2063880"/>
+            <a:off x="5973840" y="2064240"/>
             <a:ext cx="208080" cy="104040"/>
           </a:xfrm>
           <a:prstGeom prst="rect">
@@ -3474,7 +3474,7 @@
                 <a:latin typeface="Arial"/>
                 <a:ea typeface="Arial"/>
               </a:rPr>
-              <a:t>60%</a:t>
+              <a:t>61%</a:t>
             </a:r>
             <a:endParaRPr lang="en-US" sz="810" b="0" u="none" strike="noStrike">
               <a:solidFill>
@@ -3522,7 +3522,7 @@
                 <a:latin typeface="Arial"/>
                 <a:ea typeface="Arial"/>
               </a:rPr>
-              <a:t>40%</a:t>
+              <a:t>39%</a:t>
             </a:r>
             <a:endParaRPr lang="en-US" sz="810" b="0" u="none" strike="noStrike">
               <a:solidFill>
@@ -5467,7 +5467,7 @@
         </p:nvSpPr>
         <p:spPr>
           <a:xfrm>
-            <a:off x="525960" y="5552280"/>
+            <a:off x="525960" y="5547240"/>
             <a:ext cx="2265840" cy="0"/>
           </a:xfrm>
           <a:prstGeom prst="line">
@@ -5510,7 +5510,7 @@
         </p:nvSpPr>
         <p:spPr>
           <a:xfrm>
-            <a:off x="525960" y="4997880"/>
+            <a:off x="525960" y="4995720"/>
             <a:ext cx="2265840" cy="0"/>
           </a:xfrm>
           <a:prstGeom prst="line">
@@ -5553,7 +5553,7 @@
         </p:nvSpPr>
         <p:spPr>
           <a:xfrm>
-            <a:off x="525960" y="4443120"/>
+            <a:off x="525960" y="4444200"/>
             <a:ext cx="2265840" cy="0"/>
           </a:xfrm>
           <a:prstGeom prst="line">
@@ -5596,7 +5596,7 @@
         </p:nvSpPr>
         <p:spPr>
           <a:xfrm>
-            <a:off x="525960" y="3888720"/>
+            <a:off x="525960" y="3893040"/>
             <a:ext cx="2265840" cy="0"/>
           </a:xfrm>
           <a:prstGeom prst="line">
@@ -5685,8 +5685,8 @@
         </p:nvSpPr>
         <p:spPr>
           <a:xfrm>
-            <a:off x="628920" y="3709800"/>
-            <a:ext cx="2060280" cy="1757520"/>
+            <a:off x="628920" y="3691080"/>
+            <a:ext cx="2060280" cy="1776240"/>
           </a:xfrm>
           <a:custGeom>
             <a:avLst/>
@@ -5694,369 +5694,369 @@
             <a:ahLst/>
             <a:rect l="0" t="0" r="r" b="b"/>
             <a:pathLst>
-              <a:path w="5723" h="4882">
+              <a:path w="5723" h="4934">
                 <a:moveTo>
-                  <a:pt x="0" y="4437"/>
+                  <a:pt x="0" y="4516"/>
                 </a:moveTo>
                 <a:lnTo>
-                  <a:pt x="97" y="4421"/>
-                </a:lnTo>
-                <a:lnTo>
-                  <a:pt x="194" y="4404"/>
-                </a:lnTo>
-                <a:lnTo>
-                  <a:pt x="291" y="4386"/>
-                </a:lnTo>
-                <a:lnTo>
-                  <a:pt x="388" y="4368"/>
-                </a:lnTo>
-                <a:lnTo>
-                  <a:pt x="485" y="4350"/>
-                </a:lnTo>
-                <a:lnTo>
-                  <a:pt x="582" y="4331"/>
-                </a:lnTo>
-                <a:lnTo>
-                  <a:pt x="679" y="4311"/>
-                </a:lnTo>
-                <a:lnTo>
-                  <a:pt x="776" y="4291"/>
-                </a:lnTo>
-                <a:lnTo>
-                  <a:pt x="873" y="4270"/>
-                </a:lnTo>
-                <a:lnTo>
-                  <a:pt x="970" y="4249"/>
-                </a:lnTo>
-                <a:lnTo>
-                  <a:pt x="1067" y="4226"/>
-                </a:lnTo>
-                <a:lnTo>
-                  <a:pt x="1165" y="4204"/>
-                </a:lnTo>
-                <a:lnTo>
-                  <a:pt x="1262" y="4180"/>
-                </a:lnTo>
-                <a:lnTo>
-                  <a:pt x="1359" y="4155"/>
-                </a:lnTo>
-                <a:lnTo>
-                  <a:pt x="1456" y="4130"/>
-                </a:lnTo>
-                <a:lnTo>
-                  <a:pt x="1553" y="4104"/>
-                </a:lnTo>
-                <a:lnTo>
-                  <a:pt x="1650" y="4077"/>
-                </a:lnTo>
-                <a:lnTo>
-                  <a:pt x="1747" y="4048"/>
-                </a:lnTo>
-                <a:lnTo>
-                  <a:pt x="1844" y="4019"/>
-                </a:lnTo>
-                <a:lnTo>
-                  <a:pt x="1941" y="3988"/>
-                </a:lnTo>
-                <a:lnTo>
-                  <a:pt x="2038" y="3956"/>
-                </a:lnTo>
-                <a:lnTo>
-                  <a:pt x="2134" y="3923"/>
-                </a:lnTo>
-                <a:lnTo>
-                  <a:pt x="2231" y="3888"/>
-                </a:lnTo>
-                <a:lnTo>
-                  <a:pt x="2329" y="3852"/>
-                </a:lnTo>
-                <a:lnTo>
-                  <a:pt x="2426" y="3814"/>
-                </a:lnTo>
-                <a:lnTo>
-                  <a:pt x="2522" y="3774"/>
-                </a:lnTo>
-                <a:lnTo>
-                  <a:pt x="2619" y="3732"/>
-                </a:lnTo>
-                <a:lnTo>
-                  <a:pt x="2716" y="3688"/>
-                </a:lnTo>
-                <a:lnTo>
-                  <a:pt x="2813" y="3641"/>
-                </a:lnTo>
-                <a:lnTo>
-                  <a:pt x="2910" y="3592"/>
-                </a:lnTo>
-                <a:lnTo>
-                  <a:pt x="3007" y="3541"/>
-                </a:lnTo>
-                <a:lnTo>
-                  <a:pt x="3104" y="3486"/>
-                </a:lnTo>
-                <a:lnTo>
-                  <a:pt x="3201" y="3428"/>
-                </a:lnTo>
-                <a:lnTo>
-                  <a:pt x="3298" y="3367"/>
-                </a:lnTo>
-                <a:lnTo>
-                  <a:pt x="3395" y="3302"/>
-                </a:lnTo>
-                <a:lnTo>
-                  <a:pt x="3492" y="3233"/>
-                </a:lnTo>
-                <a:lnTo>
-                  <a:pt x="3589" y="3161"/>
-                </a:lnTo>
-                <a:lnTo>
-                  <a:pt x="3686" y="3084"/>
-                </a:lnTo>
-                <a:lnTo>
-                  <a:pt x="3783" y="3003"/>
-                </a:lnTo>
-                <a:lnTo>
-                  <a:pt x="3880" y="2916"/>
-                </a:lnTo>
-                <a:lnTo>
-                  <a:pt x="3977" y="2825"/>
-                </a:lnTo>
-                <a:lnTo>
-                  <a:pt x="4074" y="2729"/>
-                </a:lnTo>
-                <a:lnTo>
-                  <a:pt x="4171" y="2627"/>
-                </a:lnTo>
-                <a:lnTo>
-                  <a:pt x="4268" y="2520"/>
-                </a:lnTo>
-                <a:lnTo>
-                  <a:pt x="4365" y="2406"/>
-                </a:lnTo>
-                <a:lnTo>
-                  <a:pt x="4462" y="2286"/>
-                </a:lnTo>
-                <a:lnTo>
-                  <a:pt x="4559" y="2160"/>
-                </a:lnTo>
-                <a:lnTo>
-                  <a:pt x="4656" y="2026"/>
-                </a:lnTo>
-                <a:lnTo>
-                  <a:pt x="4753" y="1885"/>
-                </a:lnTo>
-                <a:lnTo>
-                  <a:pt x="4850" y="1737"/>
-                </a:lnTo>
-                <a:lnTo>
-                  <a:pt x="4947" y="1581"/>
-                </a:lnTo>
-                <a:lnTo>
-                  <a:pt x="5044" y="1416"/>
-                </a:lnTo>
-                <a:lnTo>
-                  <a:pt x="5141" y="1244"/>
-                </a:lnTo>
-                <a:lnTo>
-                  <a:pt x="5238" y="1062"/>
-                </a:lnTo>
-                <a:lnTo>
-                  <a:pt x="5335" y="870"/>
-                </a:lnTo>
-                <a:lnTo>
-                  <a:pt x="5432" y="668"/>
-                </a:lnTo>
-                <a:lnTo>
-                  <a:pt x="5529" y="457"/>
-                </a:lnTo>
-                <a:lnTo>
-                  <a:pt x="5626" y="234"/>
+                  <a:pt x="97" y="4500"/>
+                </a:lnTo>
+                <a:lnTo>
+                  <a:pt x="194" y="4483"/>
+                </a:lnTo>
+                <a:lnTo>
+                  <a:pt x="291" y="4465"/>
+                </a:lnTo>
+                <a:lnTo>
+                  <a:pt x="388" y="4448"/>
+                </a:lnTo>
+                <a:lnTo>
+                  <a:pt x="485" y="4429"/>
+                </a:lnTo>
+                <a:lnTo>
+                  <a:pt x="582" y="4410"/>
+                </a:lnTo>
+                <a:lnTo>
+                  <a:pt x="679" y="4391"/>
+                </a:lnTo>
+                <a:lnTo>
+                  <a:pt x="776" y="4371"/>
+                </a:lnTo>
+                <a:lnTo>
+                  <a:pt x="873" y="4350"/>
+                </a:lnTo>
+                <a:lnTo>
+                  <a:pt x="970" y="4328"/>
+                </a:lnTo>
+                <a:lnTo>
+                  <a:pt x="1067" y="4306"/>
+                </a:lnTo>
+                <a:lnTo>
+                  <a:pt x="1165" y="4283"/>
+                </a:lnTo>
+                <a:lnTo>
+                  <a:pt x="1262" y="4260"/>
+                </a:lnTo>
+                <a:lnTo>
+                  <a:pt x="1359" y="4235"/>
+                </a:lnTo>
+                <a:lnTo>
+                  <a:pt x="1456" y="4210"/>
+                </a:lnTo>
+                <a:lnTo>
+                  <a:pt x="1553" y="4183"/>
+                </a:lnTo>
+                <a:lnTo>
+                  <a:pt x="1650" y="4156"/>
+                </a:lnTo>
+                <a:lnTo>
+                  <a:pt x="1747" y="4128"/>
+                </a:lnTo>
+                <a:lnTo>
+                  <a:pt x="1844" y="4098"/>
+                </a:lnTo>
+                <a:lnTo>
+                  <a:pt x="1941" y="4068"/>
+                </a:lnTo>
+                <a:lnTo>
+                  <a:pt x="2038" y="4035"/>
+                </a:lnTo>
+                <a:lnTo>
+                  <a:pt x="2134" y="4002"/>
+                </a:lnTo>
+                <a:lnTo>
+                  <a:pt x="2231" y="3967"/>
+                </a:lnTo>
+                <a:lnTo>
+                  <a:pt x="2329" y="3930"/>
+                </a:lnTo>
+                <a:lnTo>
+                  <a:pt x="2426" y="3892"/>
+                </a:lnTo>
+                <a:lnTo>
+                  <a:pt x="2522" y="3852"/>
+                </a:lnTo>
+                <a:lnTo>
+                  <a:pt x="2619" y="3809"/>
+                </a:lnTo>
+                <a:lnTo>
+                  <a:pt x="2716" y="3765"/>
+                </a:lnTo>
+                <a:lnTo>
+                  <a:pt x="2813" y="3718"/>
+                </a:lnTo>
+                <a:lnTo>
+                  <a:pt x="2910" y="3669"/>
+                </a:lnTo>
+                <a:lnTo>
+                  <a:pt x="3007" y="3616"/>
+                </a:lnTo>
+                <a:lnTo>
+                  <a:pt x="3104" y="3561"/>
+                </a:lnTo>
+                <a:lnTo>
+                  <a:pt x="3201" y="3503"/>
+                </a:lnTo>
+                <a:lnTo>
+                  <a:pt x="3298" y="3441"/>
+                </a:lnTo>
+                <a:lnTo>
+                  <a:pt x="3395" y="3375"/>
+                </a:lnTo>
+                <a:lnTo>
+                  <a:pt x="3492" y="3306"/>
+                </a:lnTo>
+                <a:lnTo>
+                  <a:pt x="3589" y="3233"/>
+                </a:lnTo>
+                <a:lnTo>
+                  <a:pt x="3686" y="3155"/>
+                </a:lnTo>
+                <a:lnTo>
+                  <a:pt x="3783" y="3072"/>
+                </a:lnTo>
+                <a:lnTo>
+                  <a:pt x="3880" y="2985"/>
+                </a:lnTo>
+                <a:lnTo>
+                  <a:pt x="3977" y="2893"/>
+                </a:lnTo>
+                <a:lnTo>
+                  <a:pt x="4074" y="2795"/>
+                </a:lnTo>
+                <a:lnTo>
+                  <a:pt x="4171" y="2692"/>
+                </a:lnTo>
+                <a:lnTo>
+                  <a:pt x="4268" y="2582"/>
+                </a:lnTo>
+                <a:lnTo>
+                  <a:pt x="4365" y="2467"/>
+                </a:lnTo>
+                <a:lnTo>
+                  <a:pt x="4462" y="2345"/>
+                </a:lnTo>
+                <a:lnTo>
+                  <a:pt x="4559" y="2216"/>
+                </a:lnTo>
+                <a:lnTo>
+                  <a:pt x="4656" y="2079"/>
+                </a:lnTo>
+                <a:lnTo>
+                  <a:pt x="4753" y="1936"/>
+                </a:lnTo>
+                <a:lnTo>
+                  <a:pt x="4850" y="1784"/>
+                </a:lnTo>
+                <a:lnTo>
+                  <a:pt x="4947" y="1625"/>
+                </a:lnTo>
+                <a:lnTo>
+                  <a:pt x="5044" y="1457"/>
+                </a:lnTo>
+                <a:lnTo>
+                  <a:pt x="5141" y="1280"/>
+                </a:lnTo>
+                <a:lnTo>
+                  <a:pt x="5238" y="1093"/>
+                </a:lnTo>
+                <a:lnTo>
+                  <a:pt x="5335" y="896"/>
+                </a:lnTo>
+                <a:lnTo>
+                  <a:pt x="5432" y="689"/>
+                </a:lnTo>
+                <a:lnTo>
+                  <a:pt x="5529" y="471"/>
+                </a:lnTo>
+                <a:lnTo>
+                  <a:pt x="5626" y="242"/>
                 </a:lnTo>
                 <a:lnTo>
                   <a:pt x="5723" y="0"/>
                 </a:lnTo>
                 <a:lnTo>
-                  <a:pt x="5723" y="2914"/>
-                </a:lnTo>
-                <a:lnTo>
-                  <a:pt x="5626" y="2969"/>
-                </a:lnTo>
-                <a:lnTo>
-                  <a:pt x="5529" y="3022"/>
-                </a:lnTo>
-                <a:lnTo>
-                  <a:pt x="5432" y="3075"/>
-                </a:lnTo>
-                <a:lnTo>
-                  <a:pt x="5335" y="3126"/>
-                </a:lnTo>
-                <a:lnTo>
-                  <a:pt x="5238" y="3177"/>
-                </a:lnTo>
-                <a:lnTo>
-                  <a:pt x="5141" y="3227"/>
-                </a:lnTo>
-                <a:lnTo>
-                  <a:pt x="5044" y="3276"/>
-                </a:lnTo>
-                <a:lnTo>
-                  <a:pt x="4947" y="3324"/>
-                </a:lnTo>
-                <a:lnTo>
-                  <a:pt x="4850" y="3372"/>
-                </a:lnTo>
-                <a:lnTo>
-                  <a:pt x="4753" y="3418"/>
-                </a:lnTo>
-                <a:lnTo>
-                  <a:pt x="4656" y="3464"/>
-                </a:lnTo>
-                <a:lnTo>
-                  <a:pt x="4559" y="3510"/>
-                </a:lnTo>
-                <a:lnTo>
-                  <a:pt x="4462" y="3555"/>
-                </a:lnTo>
-                <a:lnTo>
-                  <a:pt x="4365" y="3599"/>
-                </a:lnTo>
-                <a:lnTo>
-                  <a:pt x="4268" y="3643"/>
-                </a:lnTo>
-                <a:lnTo>
-                  <a:pt x="4171" y="3686"/>
-                </a:lnTo>
-                <a:lnTo>
-                  <a:pt x="4074" y="3729"/>
-                </a:lnTo>
-                <a:lnTo>
-                  <a:pt x="3977" y="3771"/>
-                </a:lnTo>
-                <a:lnTo>
-                  <a:pt x="3880" y="3813"/>
-                </a:lnTo>
-                <a:lnTo>
-                  <a:pt x="3783" y="3854"/>
-                </a:lnTo>
-                <a:lnTo>
-                  <a:pt x="3686" y="3895"/>
-                </a:lnTo>
-                <a:lnTo>
-                  <a:pt x="3589" y="3935"/>
-                </a:lnTo>
-                <a:lnTo>
-                  <a:pt x="3492" y="3975"/>
-                </a:lnTo>
-                <a:lnTo>
-                  <a:pt x="3395" y="4014"/>
-                </a:lnTo>
-                <a:lnTo>
-                  <a:pt x="3298" y="4053"/>
-                </a:lnTo>
-                <a:lnTo>
-                  <a:pt x="3201" y="4091"/>
-                </a:lnTo>
-                <a:lnTo>
-                  <a:pt x="3104" y="4129"/>
-                </a:lnTo>
-                <a:lnTo>
-                  <a:pt x="3007" y="4165"/>
-                </a:lnTo>
-                <a:lnTo>
-                  <a:pt x="2910" y="4202"/>
-                </a:lnTo>
-                <a:lnTo>
-                  <a:pt x="2813" y="4237"/>
-                </a:lnTo>
-                <a:lnTo>
-                  <a:pt x="2716" y="4272"/>
-                </a:lnTo>
-                <a:lnTo>
-                  <a:pt x="2619" y="4305"/>
-                </a:lnTo>
-                <a:lnTo>
-                  <a:pt x="2522" y="4338"/>
-                </a:lnTo>
-                <a:lnTo>
-                  <a:pt x="2426" y="4370"/>
-                </a:lnTo>
-                <a:lnTo>
-                  <a:pt x="2329" y="4401"/>
-                </a:lnTo>
-                <a:lnTo>
-                  <a:pt x="2231" y="4432"/>
-                </a:lnTo>
-                <a:lnTo>
-                  <a:pt x="2134" y="4461"/>
-                </a:lnTo>
-                <a:lnTo>
-                  <a:pt x="2038" y="4489"/>
-                </a:lnTo>
-                <a:lnTo>
-                  <a:pt x="1941" y="4516"/>
-                </a:lnTo>
-                <a:lnTo>
-                  <a:pt x="1844" y="4542"/>
-                </a:lnTo>
-                <a:lnTo>
-                  <a:pt x="1747" y="4568"/>
-                </a:lnTo>
-                <a:lnTo>
-                  <a:pt x="1650" y="4592"/>
-                </a:lnTo>
-                <a:lnTo>
-                  <a:pt x="1553" y="4616"/>
-                </a:lnTo>
-                <a:lnTo>
-                  <a:pt x="1456" y="4638"/>
-                </a:lnTo>
-                <a:lnTo>
-                  <a:pt x="1359" y="4660"/>
-                </a:lnTo>
-                <a:lnTo>
-                  <a:pt x="1262" y="4681"/>
-                </a:lnTo>
-                <a:lnTo>
-                  <a:pt x="1165" y="4701"/>
-                </a:lnTo>
-                <a:lnTo>
-                  <a:pt x="1067" y="4720"/>
-                </a:lnTo>
-                <a:lnTo>
-                  <a:pt x="970" y="4738"/>
-                </a:lnTo>
-                <a:lnTo>
-                  <a:pt x="873" y="4756"/>
-                </a:lnTo>
-                <a:lnTo>
-                  <a:pt x="776" y="4772"/>
-                </a:lnTo>
-                <a:lnTo>
-                  <a:pt x="679" y="4788"/>
-                </a:lnTo>
-                <a:lnTo>
-                  <a:pt x="582" y="4804"/>
-                </a:lnTo>
-                <a:lnTo>
-                  <a:pt x="485" y="4818"/>
-                </a:lnTo>
-                <a:lnTo>
-                  <a:pt x="388" y="4832"/>
-                </a:lnTo>
-                <a:lnTo>
-                  <a:pt x="291" y="4846"/>
-                </a:lnTo>
-                <a:lnTo>
-                  <a:pt x="194" y="4859"/>
-                </a:lnTo>
-                <a:lnTo>
-                  <a:pt x="97" y="4871"/>
-                </a:lnTo>
-                <a:lnTo>
-                  <a:pt x="0" y="4882"/>
-                </a:lnTo>
-                <a:lnTo>
-                  <a:pt x="0" y="4437"/>
+                  <a:pt x="5723" y="2934"/>
+                </a:lnTo>
+                <a:lnTo>
+                  <a:pt x="5626" y="2991"/>
+                </a:lnTo>
+                <a:lnTo>
+                  <a:pt x="5529" y="3048"/>
+                </a:lnTo>
+                <a:lnTo>
+                  <a:pt x="5432" y="3103"/>
+                </a:lnTo>
+                <a:lnTo>
+                  <a:pt x="5335" y="3157"/>
+                </a:lnTo>
+                <a:lnTo>
+                  <a:pt x="5238" y="3211"/>
+                </a:lnTo>
+                <a:lnTo>
+                  <a:pt x="5141" y="3263"/>
+                </a:lnTo>
+                <a:lnTo>
+                  <a:pt x="5044" y="3314"/>
+                </a:lnTo>
+                <a:lnTo>
+                  <a:pt x="4947" y="3365"/>
+                </a:lnTo>
+                <a:lnTo>
+                  <a:pt x="4850" y="3414"/>
+                </a:lnTo>
+                <a:lnTo>
+                  <a:pt x="4753" y="3463"/>
+                </a:lnTo>
+                <a:lnTo>
+                  <a:pt x="4656" y="3511"/>
+                </a:lnTo>
+                <a:lnTo>
+                  <a:pt x="4559" y="3558"/>
+                </a:lnTo>
+                <a:lnTo>
+                  <a:pt x="4462" y="3605"/>
+                </a:lnTo>
+                <a:lnTo>
+                  <a:pt x="4365" y="3651"/>
+                </a:lnTo>
+                <a:lnTo>
+                  <a:pt x="4268" y="3696"/>
+                </a:lnTo>
+                <a:lnTo>
+                  <a:pt x="4171" y="3740"/>
+                </a:lnTo>
+                <a:lnTo>
+                  <a:pt x="4074" y="3784"/>
+                </a:lnTo>
+                <a:lnTo>
+                  <a:pt x="3977" y="3827"/>
+                </a:lnTo>
+                <a:lnTo>
+                  <a:pt x="3880" y="3870"/>
+                </a:lnTo>
+                <a:lnTo>
+                  <a:pt x="3783" y="3912"/>
+                </a:lnTo>
+                <a:lnTo>
+                  <a:pt x="3686" y="3954"/>
+                </a:lnTo>
+                <a:lnTo>
+                  <a:pt x="3589" y="3995"/>
+                </a:lnTo>
+                <a:lnTo>
+                  <a:pt x="3492" y="4035"/>
+                </a:lnTo>
+                <a:lnTo>
+                  <a:pt x="3395" y="4075"/>
+                </a:lnTo>
+                <a:lnTo>
+                  <a:pt x="3298" y="4115"/>
+                </a:lnTo>
+                <a:lnTo>
+                  <a:pt x="3201" y="4153"/>
+                </a:lnTo>
+                <a:lnTo>
+                  <a:pt x="3104" y="4191"/>
+                </a:lnTo>
+                <a:lnTo>
+                  <a:pt x="3007" y="4228"/>
+                </a:lnTo>
+                <a:lnTo>
+                  <a:pt x="2910" y="4264"/>
+                </a:lnTo>
+                <a:lnTo>
+                  <a:pt x="2813" y="4300"/>
+                </a:lnTo>
+                <a:lnTo>
+                  <a:pt x="2716" y="4334"/>
+                </a:lnTo>
+                <a:lnTo>
+                  <a:pt x="2619" y="4368"/>
+                </a:lnTo>
+                <a:lnTo>
+                  <a:pt x="2522" y="4401"/>
+                </a:lnTo>
+                <a:lnTo>
+                  <a:pt x="2426" y="4433"/>
+                </a:lnTo>
+                <a:lnTo>
+                  <a:pt x="2329" y="4464"/>
+                </a:lnTo>
+                <a:lnTo>
+                  <a:pt x="2231" y="4493"/>
+                </a:lnTo>
+                <a:lnTo>
+                  <a:pt x="2134" y="4522"/>
+                </a:lnTo>
+                <a:lnTo>
+                  <a:pt x="2038" y="4550"/>
+                </a:lnTo>
+                <a:lnTo>
+                  <a:pt x="1941" y="4577"/>
+                </a:lnTo>
+                <a:lnTo>
+                  <a:pt x="1844" y="4603"/>
+                </a:lnTo>
+                <a:lnTo>
+                  <a:pt x="1747" y="4628"/>
+                </a:lnTo>
+                <a:lnTo>
+                  <a:pt x="1650" y="4652"/>
+                </a:lnTo>
+                <a:lnTo>
+                  <a:pt x="1553" y="4675"/>
+                </a:lnTo>
+                <a:lnTo>
+                  <a:pt x="1456" y="4697"/>
+                </a:lnTo>
+                <a:lnTo>
+                  <a:pt x="1359" y="4718"/>
+                </a:lnTo>
+                <a:lnTo>
+                  <a:pt x="1262" y="4739"/>
+                </a:lnTo>
+                <a:lnTo>
+                  <a:pt x="1165" y="4758"/>
+                </a:lnTo>
+                <a:lnTo>
+                  <a:pt x="1067" y="4777"/>
+                </a:lnTo>
+                <a:lnTo>
+                  <a:pt x="970" y="4795"/>
+                </a:lnTo>
+                <a:lnTo>
+                  <a:pt x="873" y="4812"/>
+                </a:lnTo>
+                <a:lnTo>
+                  <a:pt x="776" y="4828"/>
+                </a:lnTo>
+                <a:lnTo>
+                  <a:pt x="679" y="4843"/>
+                </a:lnTo>
+                <a:lnTo>
+                  <a:pt x="582" y="4858"/>
+                </a:lnTo>
+                <a:lnTo>
+                  <a:pt x="485" y="4873"/>
+                </a:lnTo>
+                <a:lnTo>
+                  <a:pt x="388" y="4886"/>
+                </a:lnTo>
+                <a:lnTo>
+                  <a:pt x="291" y="4899"/>
+                </a:lnTo>
+                <a:lnTo>
+                  <a:pt x="194" y="4911"/>
+                </a:lnTo>
+                <a:lnTo>
+                  <a:pt x="97" y="4923"/>
+                </a:lnTo>
+                <a:lnTo>
+                  <a:pt x="0" y="4934"/>
+                </a:lnTo>
+                <a:lnTo>
+                  <a:pt x="0" y="4516"/>
                 </a:lnTo>
                 <a:close/>
               </a:path>
@@ -6095,8 +6095,8 @@
         </p:nvSpPr>
         <p:spPr>
           <a:xfrm>
-            <a:off x="628920" y="3918960"/>
-            <a:ext cx="2060280" cy="1382760"/>
+            <a:off x="628920" y="3912120"/>
+            <a:ext cx="2060280" cy="1388520"/>
           </a:xfrm>
           <a:custGeom>
             <a:avLst/>
@@ -6104,180 +6104,180 @@
             <a:ahLst/>
             <a:rect l="0" t="0" r="r" b="b"/>
             <a:pathLst>
-              <a:path w="5723" h="3841">
+              <a:path w="5723" h="3857">
                 <a:moveTo>
-                  <a:pt x="0" y="3217"/>
+                  <a:pt x="0" y="3240"/>
                 </a:moveTo>
                 <a:lnTo>
-                  <a:pt x="97" y="3197"/>
-                </a:lnTo>
-                <a:lnTo>
-                  <a:pt x="194" y="3176"/>
-                </a:lnTo>
-                <a:lnTo>
-                  <a:pt x="291" y="3155"/>
-                </a:lnTo>
-                <a:lnTo>
-                  <a:pt x="388" y="3133"/>
-                </a:lnTo>
-                <a:lnTo>
-                  <a:pt x="485" y="3111"/>
-                </a:lnTo>
-                <a:lnTo>
-                  <a:pt x="582" y="3089"/>
-                </a:lnTo>
-                <a:lnTo>
-                  <a:pt x="679" y="3065"/>
-                </a:lnTo>
-                <a:lnTo>
-                  <a:pt x="776" y="3042"/>
-                </a:lnTo>
-                <a:lnTo>
-                  <a:pt x="873" y="3018"/>
-                </a:lnTo>
-                <a:lnTo>
-                  <a:pt x="970" y="2993"/>
-                </a:lnTo>
-                <a:lnTo>
-                  <a:pt x="1067" y="2968"/>
-                </a:lnTo>
-                <a:lnTo>
-                  <a:pt x="1165" y="2942"/>
-                </a:lnTo>
-                <a:lnTo>
-                  <a:pt x="1262" y="2915"/>
-                </a:lnTo>
-                <a:lnTo>
-                  <a:pt x="1359" y="2888"/>
-                </a:lnTo>
-                <a:lnTo>
-                  <a:pt x="1456" y="2860"/>
-                </a:lnTo>
-                <a:lnTo>
-                  <a:pt x="1553" y="2831"/>
-                </a:lnTo>
-                <a:lnTo>
-                  <a:pt x="1650" y="2801"/>
-                </a:lnTo>
-                <a:lnTo>
-                  <a:pt x="1747" y="2771"/>
-                </a:lnTo>
-                <a:lnTo>
-                  <a:pt x="1844" y="2739"/>
-                </a:lnTo>
-                <a:lnTo>
-                  <a:pt x="1941" y="2707"/>
-                </a:lnTo>
-                <a:lnTo>
-                  <a:pt x="2038" y="2674"/>
-                </a:lnTo>
-                <a:lnTo>
-                  <a:pt x="2134" y="2640"/>
-                </a:lnTo>
-                <a:lnTo>
-                  <a:pt x="2231" y="2604"/>
-                </a:lnTo>
-                <a:lnTo>
-                  <a:pt x="2329" y="2568"/>
-                </a:lnTo>
-                <a:lnTo>
-                  <a:pt x="2426" y="2529"/>
-                </a:lnTo>
-                <a:lnTo>
-                  <a:pt x="2522" y="2490"/>
-                </a:lnTo>
-                <a:lnTo>
-                  <a:pt x="2619" y="2449"/>
-                </a:lnTo>
-                <a:lnTo>
-                  <a:pt x="2716" y="2407"/>
-                </a:lnTo>
-                <a:lnTo>
-                  <a:pt x="2813" y="2364"/>
-                </a:lnTo>
-                <a:lnTo>
-                  <a:pt x="2910" y="2319"/>
-                </a:lnTo>
-                <a:lnTo>
-                  <a:pt x="3007" y="2272"/>
-                </a:lnTo>
-                <a:lnTo>
-                  <a:pt x="3104" y="2224"/>
-                </a:lnTo>
-                <a:lnTo>
-                  <a:pt x="3201" y="2173"/>
-                </a:lnTo>
-                <a:lnTo>
-                  <a:pt x="3298" y="2121"/>
-                </a:lnTo>
-                <a:lnTo>
-                  <a:pt x="3395" y="2067"/>
-                </a:lnTo>
-                <a:lnTo>
-                  <a:pt x="3492" y="2011"/>
-                </a:lnTo>
-                <a:lnTo>
-                  <a:pt x="3589" y="1953"/>
-                </a:lnTo>
-                <a:lnTo>
-                  <a:pt x="3686" y="1892"/>
-                </a:lnTo>
-                <a:lnTo>
-                  <a:pt x="3783" y="1830"/>
-                </a:lnTo>
-                <a:lnTo>
-                  <a:pt x="3880" y="1765"/>
-                </a:lnTo>
-                <a:lnTo>
-                  <a:pt x="3977" y="1697"/>
-                </a:lnTo>
-                <a:lnTo>
-                  <a:pt x="4074" y="1628"/>
-                </a:lnTo>
-                <a:lnTo>
-                  <a:pt x="4171" y="1556"/>
-                </a:lnTo>
-                <a:lnTo>
-                  <a:pt x="4268" y="1481"/>
-                </a:lnTo>
-                <a:lnTo>
-                  <a:pt x="4365" y="1403"/>
-                </a:lnTo>
-                <a:lnTo>
-                  <a:pt x="4462" y="1323"/>
-                </a:lnTo>
-                <a:lnTo>
-                  <a:pt x="4559" y="1240"/>
-                </a:lnTo>
-                <a:lnTo>
-                  <a:pt x="4656" y="1154"/>
-                </a:lnTo>
-                <a:lnTo>
-                  <a:pt x="4753" y="1066"/>
-                </a:lnTo>
-                <a:lnTo>
-                  <a:pt x="4850" y="974"/>
-                </a:lnTo>
-                <a:lnTo>
-                  <a:pt x="4947" y="879"/>
-                </a:lnTo>
-                <a:lnTo>
-                  <a:pt x="5044" y="781"/>
-                </a:lnTo>
-                <a:lnTo>
-                  <a:pt x="5141" y="680"/>
-                </a:lnTo>
-                <a:lnTo>
-                  <a:pt x="5238" y="575"/>
-                </a:lnTo>
-                <a:lnTo>
-                  <a:pt x="5335" y="467"/>
-                </a:lnTo>
-                <a:lnTo>
-                  <a:pt x="5432" y="356"/>
-                </a:lnTo>
-                <a:lnTo>
-                  <a:pt x="5529" y="241"/>
+                  <a:pt x="97" y="3219"/>
+                </a:lnTo>
+                <a:lnTo>
+                  <a:pt x="194" y="3198"/>
+                </a:lnTo>
+                <a:lnTo>
+                  <a:pt x="291" y="3177"/>
+                </a:lnTo>
+                <a:lnTo>
+                  <a:pt x="388" y="3155"/>
+                </a:lnTo>
+                <a:lnTo>
+                  <a:pt x="485" y="3133"/>
+                </a:lnTo>
+                <a:lnTo>
+                  <a:pt x="582" y="3110"/>
+                </a:lnTo>
+                <a:lnTo>
+                  <a:pt x="679" y="3087"/>
+                </a:lnTo>
+                <a:lnTo>
+                  <a:pt x="776" y="3064"/>
+                </a:lnTo>
+                <a:lnTo>
+                  <a:pt x="873" y="3039"/>
+                </a:lnTo>
+                <a:lnTo>
+                  <a:pt x="970" y="3014"/>
+                </a:lnTo>
+                <a:lnTo>
+                  <a:pt x="1067" y="2989"/>
+                </a:lnTo>
+                <a:lnTo>
+                  <a:pt x="1165" y="2963"/>
+                </a:lnTo>
+                <a:lnTo>
+                  <a:pt x="1262" y="2936"/>
+                </a:lnTo>
+                <a:lnTo>
+                  <a:pt x="1359" y="2909"/>
+                </a:lnTo>
+                <a:lnTo>
+                  <a:pt x="1456" y="2881"/>
+                </a:lnTo>
+                <a:lnTo>
+                  <a:pt x="1553" y="2852"/>
+                </a:lnTo>
+                <a:lnTo>
+                  <a:pt x="1650" y="2822"/>
+                </a:lnTo>
+                <a:lnTo>
+                  <a:pt x="1747" y="2791"/>
+                </a:lnTo>
+                <a:lnTo>
+                  <a:pt x="1844" y="2760"/>
+                </a:lnTo>
+                <a:lnTo>
+                  <a:pt x="1941" y="2727"/>
+                </a:lnTo>
+                <a:lnTo>
+                  <a:pt x="2038" y="2694"/>
+                </a:lnTo>
+                <a:lnTo>
+                  <a:pt x="2134" y="2659"/>
+                </a:lnTo>
+                <a:lnTo>
+                  <a:pt x="2231" y="2623"/>
+                </a:lnTo>
+                <a:lnTo>
+                  <a:pt x="2329" y="2586"/>
+                </a:lnTo>
+                <a:lnTo>
+                  <a:pt x="2426" y="2548"/>
+                </a:lnTo>
+                <a:lnTo>
+                  <a:pt x="2522" y="2509"/>
+                </a:lnTo>
+                <a:lnTo>
+                  <a:pt x="2619" y="2468"/>
+                </a:lnTo>
+                <a:lnTo>
+                  <a:pt x="2716" y="2426"/>
+                </a:lnTo>
+                <a:lnTo>
+                  <a:pt x="2813" y="2382"/>
+                </a:lnTo>
+                <a:lnTo>
+                  <a:pt x="2910" y="2337"/>
+                </a:lnTo>
+                <a:lnTo>
+                  <a:pt x="3007" y="2290"/>
+                </a:lnTo>
+                <a:lnTo>
+                  <a:pt x="3104" y="2241"/>
+                </a:lnTo>
+                <a:lnTo>
+                  <a:pt x="3201" y="2191"/>
+                </a:lnTo>
+                <a:lnTo>
+                  <a:pt x="3298" y="2138"/>
+                </a:lnTo>
+                <a:lnTo>
+                  <a:pt x="3395" y="2084"/>
+                </a:lnTo>
+                <a:lnTo>
+                  <a:pt x="3492" y="2027"/>
+                </a:lnTo>
+                <a:lnTo>
+                  <a:pt x="3589" y="1969"/>
+                </a:lnTo>
+                <a:lnTo>
+                  <a:pt x="3686" y="1908"/>
+                </a:lnTo>
+                <a:lnTo>
+                  <a:pt x="3783" y="1845"/>
+                </a:lnTo>
+                <a:lnTo>
+                  <a:pt x="3880" y="1780"/>
+                </a:lnTo>
+                <a:lnTo>
+                  <a:pt x="3977" y="1712"/>
+                </a:lnTo>
+                <a:lnTo>
+                  <a:pt x="4074" y="1642"/>
+                </a:lnTo>
+                <a:lnTo>
+                  <a:pt x="4171" y="1569"/>
+                </a:lnTo>
+                <a:lnTo>
+                  <a:pt x="4268" y="1494"/>
+                </a:lnTo>
+                <a:lnTo>
+                  <a:pt x="4365" y="1416"/>
+                </a:lnTo>
+                <a:lnTo>
+                  <a:pt x="4462" y="1335"/>
+                </a:lnTo>
+                <a:lnTo>
+                  <a:pt x="4559" y="1251"/>
+                </a:lnTo>
+                <a:lnTo>
+                  <a:pt x="4656" y="1165"/>
+                </a:lnTo>
+                <a:lnTo>
+                  <a:pt x="4753" y="1075"/>
+                </a:lnTo>
+                <a:lnTo>
+                  <a:pt x="4850" y="983"/>
+                </a:lnTo>
+                <a:lnTo>
+                  <a:pt x="4947" y="887"/>
+                </a:lnTo>
+                <a:lnTo>
+                  <a:pt x="5044" y="788"/>
+                </a:lnTo>
+                <a:lnTo>
+                  <a:pt x="5141" y="686"/>
+                </a:lnTo>
+                <a:lnTo>
+                  <a:pt x="5238" y="581"/>
+                </a:lnTo>
+                <a:lnTo>
+                  <a:pt x="5335" y="472"/>
+                </a:lnTo>
+                <a:lnTo>
+                  <a:pt x="5432" y="359"/>
+                </a:lnTo>
+                <a:lnTo>
+                  <a:pt x="5529" y="243"/>
                 </a:lnTo>
                 <a:lnTo>
                   <a:pt x="5626" y="123"/>
@@ -6286,181 +6286,184 @@
                   <a:pt x="5723" y="0"/>
                 </a:lnTo>
                 <a:lnTo>
-                  <a:pt x="5723" y="1928"/>
-                </a:lnTo>
-                <a:lnTo>
-                  <a:pt x="5626" y="1969"/>
-                </a:lnTo>
-                <a:lnTo>
-                  <a:pt x="5529" y="2010"/>
-                </a:lnTo>
-                <a:lnTo>
-                  <a:pt x="5432" y="2051"/>
-                </a:lnTo>
-                <a:lnTo>
-                  <a:pt x="5335" y="2091"/>
-                </a:lnTo>
-                <a:lnTo>
-                  <a:pt x="5238" y="2130"/>
-                </a:lnTo>
-                <a:lnTo>
-                  <a:pt x="5141" y="2170"/>
-                </a:lnTo>
-                <a:lnTo>
-                  <a:pt x="5044" y="2209"/>
-                </a:lnTo>
-                <a:lnTo>
-                  <a:pt x="4947" y="2248"/>
-                </a:lnTo>
-                <a:lnTo>
-                  <a:pt x="4850" y="2286"/>
-                </a:lnTo>
-                <a:lnTo>
-                  <a:pt x="4753" y="2325"/>
-                </a:lnTo>
-                <a:lnTo>
-                  <a:pt x="4656" y="2363"/>
-                </a:lnTo>
-                <a:lnTo>
-                  <a:pt x="4559" y="2401"/>
-                </a:lnTo>
-                <a:lnTo>
-                  <a:pt x="4462" y="2438"/>
-                </a:lnTo>
-                <a:lnTo>
-                  <a:pt x="4268" y="2513"/>
-                </a:lnTo>
-                <a:lnTo>
-                  <a:pt x="4171" y="2550"/>
-                </a:lnTo>
-                <a:lnTo>
-                  <a:pt x="4074" y="2588"/>
-                </a:lnTo>
-                <a:lnTo>
-                  <a:pt x="3880" y="2661"/>
-                </a:lnTo>
-                <a:lnTo>
-                  <a:pt x="3783" y="2698"/>
-                </a:lnTo>
-                <a:lnTo>
-                  <a:pt x="3686" y="2734"/>
-                </a:lnTo>
-                <a:lnTo>
-                  <a:pt x="3589" y="2770"/>
-                </a:lnTo>
-                <a:lnTo>
-                  <a:pt x="3492" y="2806"/>
-                </a:lnTo>
-                <a:lnTo>
-                  <a:pt x="3395" y="2841"/>
-                </a:lnTo>
-                <a:lnTo>
-                  <a:pt x="3298" y="2877"/>
-                </a:lnTo>
-                <a:lnTo>
-                  <a:pt x="3201" y="2912"/>
-                </a:lnTo>
-                <a:lnTo>
-                  <a:pt x="3104" y="2947"/>
-                </a:lnTo>
-                <a:lnTo>
-                  <a:pt x="3007" y="2982"/>
-                </a:lnTo>
-                <a:lnTo>
-                  <a:pt x="2910" y="3017"/>
-                </a:lnTo>
-                <a:lnTo>
-                  <a:pt x="2813" y="3051"/>
-                </a:lnTo>
-                <a:lnTo>
-                  <a:pt x="2716" y="3085"/>
-                </a:lnTo>
-                <a:lnTo>
-                  <a:pt x="2619" y="3118"/>
-                </a:lnTo>
-                <a:lnTo>
-                  <a:pt x="2522" y="3152"/>
-                </a:lnTo>
-                <a:lnTo>
-                  <a:pt x="2426" y="3185"/>
-                </a:lnTo>
-                <a:lnTo>
-                  <a:pt x="2329" y="3217"/>
-                </a:lnTo>
-                <a:lnTo>
-                  <a:pt x="2231" y="3249"/>
-                </a:lnTo>
-                <a:lnTo>
-                  <a:pt x="2134" y="3281"/>
-                </a:lnTo>
-                <a:lnTo>
-                  <a:pt x="2038" y="3312"/>
-                </a:lnTo>
-                <a:lnTo>
-                  <a:pt x="1941" y="3342"/>
-                </a:lnTo>
-                <a:lnTo>
-                  <a:pt x="1844" y="3373"/>
-                </a:lnTo>
-                <a:lnTo>
-                  <a:pt x="1747" y="3402"/>
-                </a:lnTo>
-                <a:lnTo>
-                  <a:pt x="1650" y="3431"/>
-                </a:lnTo>
-                <a:lnTo>
-                  <a:pt x="1553" y="3460"/>
-                </a:lnTo>
-                <a:lnTo>
-                  <a:pt x="1456" y="3488"/>
-                </a:lnTo>
-                <a:lnTo>
-                  <a:pt x="1359" y="3515"/>
-                </a:lnTo>
-                <a:lnTo>
-                  <a:pt x="1262" y="3542"/>
-                </a:lnTo>
-                <a:lnTo>
-                  <a:pt x="1165" y="3568"/>
-                </a:lnTo>
-                <a:lnTo>
-                  <a:pt x="1067" y="3594"/>
-                </a:lnTo>
-                <a:lnTo>
-                  <a:pt x="970" y="3619"/>
-                </a:lnTo>
-                <a:lnTo>
-                  <a:pt x="873" y="3644"/>
-                </a:lnTo>
-                <a:lnTo>
-                  <a:pt x="776" y="3668"/>
-                </a:lnTo>
-                <a:lnTo>
-                  <a:pt x="679" y="3691"/>
-                </a:lnTo>
-                <a:lnTo>
-                  <a:pt x="582" y="3714"/>
-                </a:lnTo>
-                <a:lnTo>
-                  <a:pt x="485" y="3737"/>
-                </a:lnTo>
-                <a:lnTo>
-                  <a:pt x="388" y="3759"/>
-                </a:lnTo>
-                <a:lnTo>
-                  <a:pt x="291" y="3780"/>
-                </a:lnTo>
-                <a:lnTo>
-                  <a:pt x="194" y="3801"/>
-                </a:lnTo>
-                <a:lnTo>
-                  <a:pt x="97" y="3821"/>
-                </a:lnTo>
-                <a:lnTo>
-                  <a:pt x="0" y="3841"/>
-                </a:lnTo>
-                <a:lnTo>
-                  <a:pt x="0" y="3217"/>
+                  <a:pt x="5723" y="1935"/>
+                </a:lnTo>
+                <a:lnTo>
+                  <a:pt x="5626" y="1977"/>
+                </a:lnTo>
+                <a:lnTo>
+                  <a:pt x="5529" y="2018"/>
+                </a:lnTo>
+                <a:lnTo>
+                  <a:pt x="5432" y="2059"/>
+                </a:lnTo>
+                <a:lnTo>
+                  <a:pt x="5335" y="2100"/>
+                </a:lnTo>
+                <a:lnTo>
+                  <a:pt x="5238" y="2140"/>
+                </a:lnTo>
+                <a:lnTo>
+                  <a:pt x="5141" y="2180"/>
+                </a:lnTo>
+                <a:lnTo>
+                  <a:pt x="5044" y="2219"/>
+                </a:lnTo>
+                <a:lnTo>
+                  <a:pt x="4947" y="2259"/>
+                </a:lnTo>
+                <a:lnTo>
+                  <a:pt x="4850" y="2298"/>
+                </a:lnTo>
+                <a:lnTo>
+                  <a:pt x="4753" y="2337"/>
+                </a:lnTo>
+                <a:lnTo>
+                  <a:pt x="4656" y="2375"/>
+                </a:lnTo>
+                <a:lnTo>
+                  <a:pt x="4559" y="2413"/>
+                </a:lnTo>
+                <a:lnTo>
+                  <a:pt x="4462" y="2451"/>
+                </a:lnTo>
+                <a:lnTo>
+                  <a:pt x="4365" y="2489"/>
+                </a:lnTo>
+                <a:lnTo>
+                  <a:pt x="4268" y="2527"/>
+                </a:lnTo>
+                <a:lnTo>
+                  <a:pt x="4171" y="2564"/>
+                </a:lnTo>
+                <a:lnTo>
+                  <a:pt x="4074" y="2601"/>
+                </a:lnTo>
+                <a:lnTo>
+                  <a:pt x="3880" y="2676"/>
+                </a:lnTo>
+                <a:lnTo>
+                  <a:pt x="3783" y="2713"/>
+                </a:lnTo>
+                <a:lnTo>
+                  <a:pt x="3686" y="2749"/>
+                </a:lnTo>
+                <a:lnTo>
+                  <a:pt x="3589" y="2786"/>
+                </a:lnTo>
+                <a:lnTo>
+                  <a:pt x="3492" y="2822"/>
+                </a:lnTo>
+                <a:lnTo>
+                  <a:pt x="3395" y="2858"/>
+                </a:lnTo>
+                <a:lnTo>
+                  <a:pt x="3298" y="2893"/>
+                </a:lnTo>
+                <a:lnTo>
+                  <a:pt x="3201" y="2929"/>
+                </a:lnTo>
+                <a:lnTo>
+                  <a:pt x="3104" y="2964"/>
+                </a:lnTo>
+                <a:lnTo>
+                  <a:pt x="3007" y="2999"/>
+                </a:lnTo>
+                <a:lnTo>
+                  <a:pt x="2910" y="3034"/>
+                </a:lnTo>
+                <a:lnTo>
+                  <a:pt x="2813" y="3068"/>
+                </a:lnTo>
+                <a:lnTo>
+                  <a:pt x="2716" y="3102"/>
+                </a:lnTo>
+                <a:lnTo>
+                  <a:pt x="2619" y="3136"/>
+                </a:lnTo>
+                <a:lnTo>
+                  <a:pt x="2522" y="3169"/>
+                </a:lnTo>
+                <a:lnTo>
+                  <a:pt x="2426" y="3202"/>
+                </a:lnTo>
+                <a:lnTo>
+                  <a:pt x="2329" y="3235"/>
+                </a:lnTo>
+                <a:lnTo>
+                  <a:pt x="2231" y="3267"/>
+                </a:lnTo>
+                <a:lnTo>
+                  <a:pt x="2134" y="3298"/>
+                </a:lnTo>
+                <a:lnTo>
+                  <a:pt x="2038" y="3330"/>
+                </a:lnTo>
+                <a:lnTo>
+                  <a:pt x="1941" y="3360"/>
+                </a:lnTo>
+                <a:lnTo>
+                  <a:pt x="1844" y="3390"/>
+                </a:lnTo>
+                <a:lnTo>
+                  <a:pt x="1747" y="3420"/>
+                </a:lnTo>
+                <a:lnTo>
+                  <a:pt x="1650" y="3449"/>
+                </a:lnTo>
+                <a:lnTo>
+                  <a:pt x="1553" y="3477"/>
+                </a:lnTo>
+                <a:lnTo>
+                  <a:pt x="1456" y="3505"/>
+                </a:lnTo>
+                <a:lnTo>
+                  <a:pt x="1359" y="3533"/>
+                </a:lnTo>
+                <a:lnTo>
+                  <a:pt x="1262" y="3560"/>
+                </a:lnTo>
+                <a:lnTo>
+                  <a:pt x="1165" y="3586"/>
+                </a:lnTo>
+                <a:lnTo>
+                  <a:pt x="1067" y="3611"/>
+                </a:lnTo>
+                <a:lnTo>
+                  <a:pt x="970" y="3637"/>
+                </a:lnTo>
+                <a:lnTo>
+                  <a:pt x="873" y="3661"/>
+                </a:lnTo>
+                <a:lnTo>
+                  <a:pt x="776" y="3685"/>
+                </a:lnTo>
+                <a:lnTo>
+                  <a:pt x="679" y="3708"/>
+                </a:lnTo>
+                <a:lnTo>
+                  <a:pt x="582" y="3731"/>
+                </a:lnTo>
+                <a:lnTo>
+                  <a:pt x="485" y="3754"/>
+                </a:lnTo>
+                <a:lnTo>
+                  <a:pt x="388" y="3775"/>
+                </a:lnTo>
+                <a:lnTo>
+                  <a:pt x="291" y="3797"/>
+                </a:lnTo>
+                <a:lnTo>
+                  <a:pt x="194" y="3817"/>
+                </a:lnTo>
+                <a:lnTo>
+                  <a:pt x="97" y="3837"/>
+                </a:lnTo>
+                <a:lnTo>
+                  <a:pt x="0" y="3857"/>
+                </a:lnTo>
+                <a:lnTo>
+                  <a:pt x="0" y="3240"/>
                 </a:lnTo>
                 <a:close/>
               </a:path>
@@ -6500,7 +6503,7 @@
         <p:spPr>
           <a:xfrm>
             <a:off x="628920" y="3670560"/>
-            <a:ext cx="2060280" cy="1310040"/>
+            <a:ext cx="2060280" cy="1265040"/>
           </a:xfrm>
           <a:custGeom>
             <a:avLst/>
@@ -6508,363 +6511,366 @@
             <a:ahLst/>
             <a:rect l="0" t="0" r="r" b="b"/>
             <a:pathLst>
-              <a:path w="5723" h="3639">
+              <a:path w="5723" h="3514">
                 <a:moveTo>
-                  <a:pt x="0" y="1300"/>
+                  <a:pt x="0" y="994"/>
                 </a:moveTo>
                 <a:lnTo>
-                  <a:pt x="97" y="1316"/>
-                </a:lnTo>
-                <a:lnTo>
-                  <a:pt x="194" y="1332"/>
-                </a:lnTo>
-                <a:lnTo>
-                  <a:pt x="291" y="1347"/>
-                </a:lnTo>
-                <a:lnTo>
-                  <a:pt x="388" y="1362"/>
-                </a:lnTo>
-                <a:lnTo>
-                  <a:pt x="485" y="1377"/>
-                </a:lnTo>
-                <a:lnTo>
-                  <a:pt x="582" y="1390"/>
-                </a:lnTo>
-                <a:lnTo>
-                  <a:pt x="679" y="1404"/>
-                </a:lnTo>
-                <a:lnTo>
-                  <a:pt x="776" y="1416"/>
-                </a:lnTo>
-                <a:lnTo>
-                  <a:pt x="873" y="1428"/>
-                </a:lnTo>
-                <a:lnTo>
-                  <a:pt x="970" y="1440"/>
-                </a:lnTo>
-                <a:lnTo>
-                  <a:pt x="1067" y="1451"/>
-                </a:lnTo>
-                <a:lnTo>
-                  <a:pt x="1165" y="1461"/>
-                </a:lnTo>
-                <a:lnTo>
-                  <a:pt x="1262" y="1470"/>
-                </a:lnTo>
-                <a:lnTo>
-                  <a:pt x="1359" y="1478"/>
-                </a:lnTo>
-                <a:lnTo>
-                  <a:pt x="1456" y="1486"/>
-                </a:lnTo>
-                <a:lnTo>
-                  <a:pt x="1553" y="1492"/>
-                </a:lnTo>
-                <a:lnTo>
-                  <a:pt x="1650" y="1498"/>
-                </a:lnTo>
-                <a:lnTo>
-                  <a:pt x="1747" y="1502"/>
-                </a:lnTo>
-                <a:lnTo>
-                  <a:pt x="1844" y="1506"/>
-                </a:lnTo>
-                <a:lnTo>
-                  <a:pt x="1941" y="1508"/>
-                </a:lnTo>
-                <a:lnTo>
-                  <a:pt x="2038" y="1508"/>
-                </a:lnTo>
-                <a:lnTo>
-                  <a:pt x="2134" y="1508"/>
-                </a:lnTo>
-                <a:lnTo>
-                  <a:pt x="2231" y="1505"/>
-                </a:lnTo>
-                <a:lnTo>
-                  <a:pt x="2329" y="1502"/>
-                </a:lnTo>
-                <a:lnTo>
-                  <a:pt x="2426" y="1496"/>
-                </a:lnTo>
-                <a:lnTo>
-                  <a:pt x="2522" y="1489"/>
-                </a:lnTo>
-                <a:lnTo>
-                  <a:pt x="2619" y="1479"/>
-                </a:lnTo>
-                <a:lnTo>
-                  <a:pt x="2716" y="1468"/>
-                </a:lnTo>
-                <a:lnTo>
-                  <a:pt x="2813" y="1455"/>
-                </a:lnTo>
-                <a:lnTo>
-                  <a:pt x="2910" y="1439"/>
-                </a:lnTo>
-                <a:lnTo>
-                  <a:pt x="3007" y="1422"/>
-                </a:lnTo>
-                <a:lnTo>
-                  <a:pt x="3104" y="1402"/>
-                </a:lnTo>
-                <a:lnTo>
-                  <a:pt x="3201" y="1379"/>
-                </a:lnTo>
-                <a:lnTo>
-                  <a:pt x="3298" y="1355"/>
-                </a:lnTo>
-                <a:lnTo>
-                  <a:pt x="3395" y="1327"/>
-                </a:lnTo>
-                <a:lnTo>
-                  <a:pt x="3492" y="1298"/>
-                </a:lnTo>
-                <a:lnTo>
-                  <a:pt x="3589" y="1266"/>
-                </a:lnTo>
-                <a:lnTo>
-                  <a:pt x="3686" y="1231"/>
-                </a:lnTo>
-                <a:lnTo>
-                  <a:pt x="3783" y="1194"/>
-                </a:lnTo>
-                <a:lnTo>
-                  <a:pt x="3880" y="1155"/>
-                </a:lnTo>
-                <a:lnTo>
-                  <a:pt x="3977" y="1113"/>
-                </a:lnTo>
-                <a:lnTo>
-                  <a:pt x="4074" y="1070"/>
-                </a:lnTo>
-                <a:lnTo>
-                  <a:pt x="4171" y="1023"/>
-                </a:lnTo>
-                <a:lnTo>
-                  <a:pt x="4268" y="975"/>
-                </a:lnTo>
-                <a:lnTo>
-                  <a:pt x="4365" y="924"/>
-                </a:lnTo>
-                <a:lnTo>
-                  <a:pt x="4462" y="871"/>
-                </a:lnTo>
-                <a:lnTo>
-                  <a:pt x="4559" y="816"/>
-                </a:lnTo>
-                <a:lnTo>
-                  <a:pt x="4656" y="759"/>
-                </a:lnTo>
-                <a:lnTo>
-                  <a:pt x="4753" y="700"/>
-                </a:lnTo>
-                <a:lnTo>
-                  <a:pt x="4850" y="638"/>
-                </a:lnTo>
-                <a:lnTo>
-                  <a:pt x="4947" y="575"/>
-                </a:lnTo>
-                <a:lnTo>
-                  <a:pt x="5044" y="510"/>
-                </a:lnTo>
-                <a:lnTo>
-                  <a:pt x="5141" y="443"/>
-                </a:lnTo>
-                <a:lnTo>
-                  <a:pt x="5238" y="374"/>
-                </a:lnTo>
-                <a:lnTo>
-                  <a:pt x="5335" y="303"/>
-                </a:lnTo>
-                <a:lnTo>
-                  <a:pt x="5432" y="230"/>
-                </a:lnTo>
-                <a:lnTo>
-                  <a:pt x="5529" y="155"/>
-                </a:lnTo>
-                <a:lnTo>
-                  <a:pt x="5626" y="78"/>
+                  <a:pt x="97" y="1017"/>
+                </a:lnTo>
+                <a:lnTo>
+                  <a:pt x="194" y="1039"/>
+                </a:lnTo>
+                <a:lnTo>
+                  <a:pt x="291" y="1062"/>
+                </a:lnTo>
+                <a:lnTo>
+                  <a:pt x="388" y="1083"/>
+                </a:lnTo>
+                <a:lnTo>
+                  <a:pt x="485" y="1104"/>
+                </a:lnTo>
+                <a:lnTo>
+                  <a:pt x="582" y="1124"/>
+                </a:lnTo>
+                <a:lnTo>
+                  <a:pt x="679" y="1144"/>
+                </a:lnTo>
+                <a:lnTo>
+                  <a:pt x="776" y="1163"/>
+                </a:lnTo>
+                <a:lnTo>
+                  <a:pt x="873" y="1182"/>
+                </a:lnTo>
+                <a:lnTo>
+                  <a:pt x="970" y="1199"/>
+                </a:lnTo>
+                <a:lnTo>
+                  <a:pt x="1067" y="1216"/>
+                </a:lnTo>
+                <a:lnTo>
+                  <a:pt x="1165" y="1232"/>
+                </a:lnTo>
+                <a:lnTo>
+                  <a:pt x="1262" y="1247"/>
+                </a:lnTo>
+                <a:lnTo>
+                  <a:pt x="1359" y="1261"/>
+                </a:lnTo>
+                <a:lnTo>
+                  <a:pt x="1456" y="1274"/>
+                </a:lnTo>
+                <a:lnTo>
+                  <a:pt x="1553" y="1287"/>
+                </a:lnTo>
+                <a:lnTo>
+                  <a:pt x="1650" y="1298"/>
+                </a:lnTo>
+                <a:lnTo>
+                  <a:pt x="1747" y="1308"/>
+                </a:lnTo>
+                <a:lnTo>
+                  <a:pt x="1844" y="1316"/>
+                </a:lnTo>
+                <a:lnTo>
+                  <a:pt x="1941" y="1323"/>
+                </a:lnTo>
+                <a:lnTo>
+                  <a:pt x="2038" y="1329"/>
+                </a:lnTo>
+                <a:lnTo>
+                  <a:pt x="2134" y="1334"/>
+                </a:lnTo>
+                <a:lnTo>
+                  <a:pt x="2231" y="1336"/>
+                </a:lnTo>
+                <a:lnTo>
+                  <a:pt x="2329" y="1337"/>
+                </a:lnTo>
+                <a:lnTo>
+                  <a:pt x="2426" y="1336"/>
+                </a:lnTo>
+                <a:lnTo>
+                  <a:pt x="2522" y="1334"/>
+                </a:lnTo>
+                <a:lnTo>
+                  <a:pt x="2619" y="1329"/>
+                </a:lnTo>
+                <a:lnTo>
+                  <a:pt x="2716" y="1322"/>
+                </a:lnTo>
+                <a:lnTo>
+                  <a:pt x="2813" y="1313"/>
+                </a:lnTo>
+                <a:lnTo>
+                  <a:pt x="2910" y="1302"/>
+                </a:lnTo>
+                <a:lnTo>
+                  <a:pt x="3007" y="1289"/>
+                </a:lnTo>
+                <a:lnTo>
+                  <a:pt x="3104" y="1273"/>
+                </a:lnTo>
+                <a:lnTo>
+                  <a:pt x="3201" y="1255"/>
+                </a:lnTo>
+                <a:lnTo>
+                  <a:pt x="3298" y="1234"/>
+                </a:lnTo>
+                <a:lnTo>
+                  <a:pt x="3395" y="1211"/>
+                </a:lnTo>
+                <a:lnTo>
+                  <a:pt x="3492" y="1185"/>
+                </a:lnTo>
+                <a:lnTo>
+                  <a:pt x="3589" y="1157"/>
+                </a:lnTo>
+                <a:lnTo>
+                  <a:pt x="3686" y="1127"/>
+                </a:lnTo>
+                <a:lnTo>
+                  <a:pt x="3783" y="1094"/>
+                </a:lnTo>
+                <a:lnTo>
+                  <a:pt x="3880" y="1059"/>
+                </a:lnTo>
+                <a:lnTo>
+                  <a:pt x="3977" y="1022"/>
+                </a:lnTo>
+                <a:lnTo>
+                  <a:pt x="4074" y="982"/>
+                </a:lnTo>
+                <a:lnTo>
+                  <a:pt x="4171" y="940"/>
+                </a:lnTo>
+                <a:lnTo>
+                  <a:pt x="4268" y="896"/>
+                </a:lnTo>
+                <a:lnTo>
+                  <a:pt x="4365" y="849"/>
+                </a:lnTo>
+                <a:lnTo>
+                  <a:pt x="4462" y="801"/>
+                </a:lnTo>
+                <a:lnTo>
+                  <a:pt x="4559" y="751"/>
+                </a:lnTo>
+                <a:lnTo>
+                  <a:pt x="4656" y="698"/>
+                </a:lnTo>
+                <a:lnTo>
+                  <a:pt x="4753" y="644"/>
+                </a:lnTo>
+                <a:lnTo>
+                  <a:pt x="4850" y="587"/>
+                </a:lnTo>
+                <a:lnTo>
+                  <a:pt x="4947" y="529"/>
+                </a:lnTo>
+                <a:lnTo>
+                  <a:pt x="5044" y="469"/>
+                </a:lnTo>
+                <a:lnTo>
+                  <a:pt x="5141" y="407"/>
+                </a:lnTo>
+                <a:lnTo>
+                  <a:pt x="5238" y="344"/>
+                </a:lnTo>
+                <a:lnTo>
+                  <a:pt x="5335" y="278"/>
+                </a:lnTo>
+                <a:lnTo>
+                  <a:pt x="5432" y="211"/>
+                </a:lnTo>
+                <a:lnTo>
+                  <a:pt x="5529" y="142"/>
+                </a:lnTo>
+                <a:lnTo>
+                  <a:pt x="5626" y="72"/>
                 </a:lnTo>
                 <a:lnTo>
                   <a:pt x="5723" y="0"/>
                 </a:lnTo>
                 <a:lnTo>
-                  <a:pt x="5723" y="2843"/>
-                </a:lnTo>
-                <a:lnTo>
-                  <a:pt x="5626" y="2835"/>
-                </a:lnTo>
-                <a:lnTo>
-                  <a:pt x="5529" y="2827"/>
-                </a:lnTo>
-                <a:lnTo>
-                  <a:pt x="5432" y="2820"/>
-                </a:lnTo>
-                <a:lnTo>
-                  <a:pt x="5335" y="2812"/>
-                </a:lnTo>
-                <a:lnTo>
-                  <a:pt x="5238" y="2805"/>
-                </a:lnTo>
-                <a:lnTo>
-                  <a:pt x="5141" y="2799"/>
-                </a:lnTo>
-                <a:lnTo>
-                  <a:pt x="5044" y="2793"/>
-                </a:lnTo>
-                <a:lnTo>
-                  <a:pt x="4947" y="2788"/>
-                </a:lnTo>
-                <a:lnTo>
-                  <a:pt x="4850" y="2783"/>
-                </a:lnTo>
-                <a:lnTo>
-                  <a:pt x="4753" y="2779"/>
-                </a:lnTo>
-                <a:lnTo>
-                  <a:pt x="4656" y="2775"/>
-                </a:lnTo>
-                <a:lnTo>
-                  <a:pt x="4559" y="2772"/>
-                </a:lnTo>
-                <a:lnTo>
-                  <a:pt x="4462" y="2770"/>
-                </a:lnTo>
-                <a:lnTo>
-                  <a:pt x="4365" y="2769"/>
-                </a:lnTo>
-                <a:lnTo>
-                  <a:pt x="4268" y="2769"/>
-                </a:lnTo>
-                <a:lnTo>
-                  <a:pt x="4171" y="2769"/>
-                </a:lnTo>
-                <a:lnTo>
-                  <a:pt x="4074" y="2771"/>
-                </a:lnTo>
-                <a:lnTo>
-                  <a:pt x="3977" y="2773"/>
-                </a:lnTo>
-                <a:lnTo>
-                  <a:pt x="3880" y="2777"/>
-                </a:lnTo>
-                <a:lnTo>
-                  <a:pt x="3783" y="2782"/>
-                </a:lnTo>
-                <a:lnTo>
-                  <a:pt x="3686" y="2788"/>
-                </a:lnTo>
-                <a:lnTo>
-                  <a:pt x="3589" y="2796"/>
-                </a:lnTo>
-                <a:lnTo>
-                  <a:pt x="3492" y="2805"/>
-                </a:lnTo>
-                <a:lnTo>
-                  <a:pt x="3395" y="2815"/>
-                </a:lnTo>
-                <a:lnTo>
-                  <a:pt x="3298" y="2826"/>
-                </a:lnTo>
-                <a:lnTo>
-                  <a:pt x="3201" y="2839"/>
-                </a:lnTo>
-                <a:lnTo>
-                  <a:pt x="3104" y="2853"/>
-                </a:lnTo>
-                <a:lnTo>
-                  <a:pt x="3007" y="2868"/>
-                </a:lnTo>
-                <a:lnTo>
-                  <a:pt x="2910" y="2885"/>
-                </a:lnTo>
-                <a:lnTo>
-                  <a:pt x="2813" y="2903"/>
-                </a:lnTo>
-                <a:lnTo>
-                  <a:pt x="2716" y="2921"/>
-                </a:lnTo>
-                <a:lnTo>
-                  <a:pt x="2619" y="2942"/>
-                </a:lnTo>
-                <a:lnTo>
-                  <a:pt x="2522" y="2963"/>
-                </a:lnTo>
-                <a:lnTo>
-                  <a:pt x="2426" y="2985"/>
-                </a:lnTo>
-                <a:lnTo>
-                  <a:pt x="2329" y="3007"/>
-                </a:lnTo>
-                <a:lnTo>
-                  <a:pt x="2231" y="3031"/>
-                </a:lnTo>
-                <a:lnTo>
-                  <a:pt x="2134" y="3055"/>
-                </a:lnTo>
-                <a:lnTo>
-                  <a:pt x="2038" y="3080"/>
-                </a:lnTo>
-                <a:lnTo>
-                  <a:pt x="1941" y="3106"/>
-                </a:lnTo>
-                <a:lnTo>
-                  <a:pt x="1844" y="3132"/>
-                </a:lnTo>
-                <a:lnTo>
-                  <a:pt x="1747" y="3158"/>
-                </a:lnTo>
-                <a:lnTo>
-                  <a:pt x="1650" y="3185"/>
-                </a:lnTo>
-                <a:lnTo>
-                  <a:pt x="1553" y="3211"/>
-                </a:lnTo>
-                <a:lnTo>
-                  <a:pt x="1456" y="3238"/>
-                </a:lnTo>
-                <a:lnTo>
-                  <a:pt x="1359" y="3266"/>
-                </a:lnTo>
-                <a:lnTo>
-                  <a:pt x="1262" y="3293"/>
-                </a:lnTo>
-                <a:lnTo>
-                  <a:pt x="1165" y="3320"/>
-                </a:lnTo>
-                <a:lnTo>
-                  <a:pt x="1067" y="3347"/>
-                </a:lnTo>
-                <a:lnTo>
-                  <a:pt x="873" y="3402"/>
-                </a:lnTo>
-                <a:lnTo>
-                  <a:pt x="776" y="3429"/>
-                </a:lnTo>
-                <a:lnTo>
-                  <a:pt x="582" y="3483"/>
-                </a:lnTo>
-                <a:lnTo>
-                  <a:pt x="485" y="3509"/>
-                </a:lnTo>
-                <a:lnTo>
-                  <a:pt x="388" y="3535"/>
-                </a:lnTo>
-                <a:lnTo>
-                  <a:pt x="291" y="3561"/>
-                </a:lnTo>
-                <a:lnTo>
-                  <a:pt x="194" y="3587"/>
-                </a:lnTo>
-                <a:lnTo>
-                  <a:pt x="97" y="3613"/>
-                </a:lnTo>
-                <a:lnTo>
-                  <a:pt x="0" y="3639"/>
-                </a:lnTo>
-                <a:lnTo>
-                  <a:pt x="0" y="1300"/>
+                  <a:pt x="5723" y="2858"/>
+                </a:lnTo>
+                <a:lnTo>
+                  <a:pt x="5626" y="2846"/>
+                </a:lnTo>
+                <a:lnTo>
+                  <a:pt x="5529" y="2835"/>
+                </a:lnTo>
+                <a:lnTo>
+                  <a:pt x="5432" y="2824"/>
+                </a:lnTo>
+                <a:lnTo>
+                  <a:pt x="5335" y="2813"/>
+                </a:lnTo>
+                <a:lnTo>
+                  <a:pt x="5238" y="2803"/>
+                </a:lnTo>
+                <a:lnTo>
+                  <a:pt x="5141" y="2793"/>
+                </a:lnTo>
+                <a:lnTo>
+                  <a:pt x="5044" y="2784"/>
+                </a:lnTo>
+                <a:lnTo>
+                  <a:pt x="4947" y="2775"/>
+                </a:lnTo>
+                <a:lnTo>
+                  <a:pt x="4850" y="2767"/>
+                </a:lnTo>
+                <a:lnTo>
+                  <a:pt x="4753" y="2759"/>
+                </a:lnTo>
+                <a:lnTo>
+                  <a:pt x="4656" y="2752"/>
+                </a:lnTo>
+                <a:lnTo>
+                  <a:pt x="4559" y="2746"/>
+                </a:lnTo>
+                <a:lnTo>
+                  <a:pt x="4462" y="2740"/>
+                </a:lnTo>
+                <a:lnTo>
+                  <a:pt x="4365" y="2736"/>
+                </a:lnTo>
+                <a:lnTo>
+                  <a:pt x="4268" y="2732"/>
+                </a:lnTo>
+                <a:lnTo>
+                  <a:pt x="4171" y="2729"/>
+                </a:lnTo>
+                <a:lnTo>
+                  <a:pt x="4074" y="2727"/>
+                </a:lnTo>
+                <a:lnTo>
+                  <a:pt x="3977" y="2726"/>
+                </a:lnTo>
+                <a:lnTo>
+                  <a:pt x="3880" y="2726"/>
+                </a:lnTo>
+                <a:lnTo>
+                  <a:pt x="3783" y="2728"/>
+                </a:lnTo>
+                <a:lnTo>
+                  <a:pt x="3686" y="2731"/>
+                </a:lnTo>
+                <a:lnTo>
+                  <a:pt x="3589" y="2735"/>
+                </a:lnTo>
+                <a:lnTo>
+                  <a:pt x="3492" y="2740"/>
+                </a:lnTo>
+                <a:lnTo>
+                  <a:pt x="3395" y="2747"/>
+                </a:lnTo>
+                <a:lnTo>
+                  <a:pt x="3298" y="2755"/>
+                </a:lnTo>
+                <a:lnTo>
+                  <a:pt x="3201" y="2765"/>
+                </a:lnTo>
+                <a:lnTo>
+                  <a:pt x="3104" y="2776"/>
+                </a:lnTo>
+                <a:lnTo>
+                  <a:pt x="3007" y="2788"/>
+                </a:lnTo>
+                <a:lnTo>
+                  <a:pt x="2910" y="2802"/>
+                </a:lnTo>
+                <a:lnTo>
+                  <a:pt x="2813" y="2817"/>
+                </a:lnTo>
+                <a:lnTo>
+                  <a:pt x="2716" y="2833"/>
+                </a:lnTo>
+                <a:lnTo>
+                  <a:pt x="2619" y="2851"/>
+                </a:lnTo>
+                <a:lnTo>
+                  <a:pt x="2522" y="2869"/>
+                </a:lnTo>
+                <a:lnTo>
+                  <a:pt x="2426" y="2889"/>
+                </a:lnTo>
+                <a:lnTo>
+                  <a:pt x="2329" y="2910"/>
+                </a:lnTo>
+                <a:lnTo>
+                  <a:pt x="2231" y="2931"/>
+                </a:lnTo>
+                <a:lnTo>
+                  <a:pt x="2134" y="2953"/>
+                </a:lnTo>
+                <a:lnTo>
+                  <a:pt x="2038" y="2976"/>
+                </a:lnTo>
+                <a:lnTo>
+                  <a:pt x="1941" y="3000"/>
+                </a:lnTo>
+                <a:lnTo>
+                  <a:pt x="1844" y="3024"/>
+                </a:lnTo>
+                <a:lnTo>
+                  <a:pt x="1747" y="3049"/>
+                </a:lnTo>
+                <a:lnTo>
+                  <a:pt x="1650" y="3074"/>
+                </a:lnTo>
+                <a:lnTo>
+                  <a:pt x="1553" y="3099"/>
+                </a:lnTo>
+                <a:lnTo>
+                  <a:pt x="1456" y="3125"/>
+                </a:lnTo>
+                <a:lnTo>
+                  <a:pt x="1359" y="3151"/>
+                </a:lnTo>
+                <a:lnTo>
+                  <a:pt x="1262" y="3177"/>
+                </a:lnTo>
+                <a:lnTo>
+                  <a:pt x="1165" y="3203"/>
+                </a:lnTo>
+                <a:lnTo>
+                  <a:pt x="1067" y="3229"/>
+                </a:lnTo>
+                <a:lnTo>
+                  <a:pt x="873" y="3282"/>
+                </a:lnTo>
+                <a:lnTo>
+                  <a:pt x="776" y="3308"/>
+                </a:lnTo>
+                <a:lnTo>
+                  <a:pt x="679" y="3334"/>
+                </a:lnTo>
+                <a:lnTo>
+                  <a:pt x="582" y="3360"/>
+                </a:lnTo>
+                <a:lnTo>
+                  <a:pt x="485" y="3386"/>
+                </a:lnTo>
+                <a:lnTo>
+                  <a:pt x="388" y="3412"/>
+                </a:lnTo>
+                <a:lnTo>
+                  <a:pt x="291" y="3438"/>
+                </a:lnTo>
+                <a:lnTo>
+                  <a:pt x="194" y="3463"/>
+                </a:lnTo>
+                <a:lnTo>
+                  <a:pt x="97" y="3489"/>
+                </a:lnTo>
+                <a:lnTo>
+                  <a:pt x="0" y="3514"/>
+                </a:lnTo>
+                <a:lnTo>
+                  <a:pt x="0" y="994"/>
                 </a:lnTo>
                 <a:close/>
               </a:path>
@@ -6903,8 +6909,8 @@
         </p:nvSpPr>
         <p:spPr>
           <a:xfrm>
-            <a:off x="628920" y="4342680"/>
-            <a:ext cx="2060280" cy="1065240"/>
+            <a:off x="628920" y="4328280"/>
+            <a:ext cx="2060280" cy="1083240"/>
           </a:xfrm>
           <a:custGeom>
             <a:avLst/>
@@ -6912,183 +6918,183 @@
             <a:ahLst/>
             <a:rect l="0" t="0" r="r" b="b"/>
             <a:pathLst>
-              <a:path fill="none" w="5723" h="2959">
+              <a:path fill="none" w="5723" h="3009">
                 <a:moveTo>
-                  <a:pt x="0" y="2959"/>
+                  <a:pt x="0" y="3009"/>
                 </a:moveTo>
                 <a:lnTo>
-                  <a:pt x="97" y="2945"/>
-                </a:lnTo>
-                <a:lnTo>
-                  <a:pt x="194" y="2929"/>
-                </a:lnTo>
-                <a:lnTo>
-                  <a:pt x="291" y="2913"/>
-                </a:lnTo>
-                <a:lnTo>
-                  <a:pt x="388" y="2897"/>
-                </a:lnTo>
-                <a:lnTo>
-                  <a:pt x="485" y="2880"/>
-                </a:lnTo>
-                <a:lnTo>
-                  <a:pt x="582" y="2862"/>
-                </a:lnTo>
-                <a:lnTo>
-                  <a:pt x="679" y="2844"/>
-                </a:lnTo>
-                <a:lnTo>
-                  <a:pt x="776" y="2825"/>
-                </a:lnTo>
-                <a:lnTo>
-                  <a:pt x="873" y="2805"/>
-                </a:lnTo>
-                <a:lnTo>
-                  <a:pt x="970" y="2785"/>
-                </a:lnTo>
-                <a:lnTo>
-                  <a:pt x="1067" y="2764"/>
-                </a:lnTo>
-                <a:lnTo>
-                  <a:pt x="1165" y="2742"/>
-                </a:lnTo>
-                <a:lnTo>
-                  <a:pt x="1262" y="2719"/>
-                </a:lnTo>
-                <a:lnTo>
-                  <a:pt x="1359" y="2696"/>
-                </a:lnTo>
-                <a:lnTo>
-                  <a:pt x="1456" y="2671"/>
-                </a:lnTo>
-                <a:lnTo>
-                  <a:pt x="1553" y="2646"/>
-                </a:lnTo>
-                <a:lnTo>
-                  <a:pt x="1650" y="2620"/>
-                </a:lnTo>
-                <a:lnTo>
-                  <a:pt x="1747" y="2593"/>
-                </a:lnTo>
-                <a:lnTo>
-                  <a:pt x="1844" y="2565"/>
-                </a:lnTo>
-                <a:lnTo>
-                  <a:pt x="1941" y="2535"/>
-                </a:lnTo>
-                <a:lnTo>
-                  <a:pt x="2038" y="2505"/>
-                </a:lnTo>
-                <a:lnTo>
-                  <a:pt x="2134" y="2474"/>
-                </a:lnTo>
-                <a:lnTo>
-                  <a:pt x="2231" y="2441"/>
-                </a:lnTo>
-                <a:lnTo>
-                  <a:pt x="2329" y="2407"/>
-                </a:lnTo>
-                <a:lnTo>
-                  <a:pt x="2426" y="2372"/>
-                </a:lnTo>
-                <a:lnTo>
-                  <a:pt x="2522" y="2336"/>
-                </a:lnTo>
-                <a:lnTo>
-                  <a:pt x="2619" y="2299"/>
-                </a:lnTo>
-                <a:lnTo>
-                  <a:pt x="2716" y="2260"/>
-                </a:lnTo>
-                <a:lnTo>
-                  <a:pt x="2813" y="2219"/>
-                </a:lnTo>
-                <a:lnTo>
-                  <a:pt x="2910" y="2177"/>
-                </a:lnTo>
-                <a:lnTo>
-                  <a:pt x="3007" y="2134"/>
-                </a:lnTo>
-                <a:lnTo>
-                  <a:pt x="3104" y="2089"/>
-                </a:lnTo>
-                <a:lnTo>
-                  <a:pt x="3201" y="2042"/>
-                </a:lnTo>
-                <a:lnTo>
-                  <a:pt x="3298" y="1994"/>
-                </a:lnTo>
-                <a:lnTo>
-                  <a:pt x="3395" y="1944"/>
-                </a:lnTo>
-                <a:lnTo>
-                  <a:pt x="3492" y="1892"/>
-                </a:lnTo>
-                <a:lnTo>
-                  <a:pt x="3589" y="1838"/>
-                </a:lnTo>
-                <a:lnTo>
-                  <a:pt x="3686" y="1782"/>
-                </a:lnTo>
-                <a:lnTo>
-                  <a:pt x="3783" y="1724"/>
-                </a:lnTo>
-                <a:lnTo>
-                  <a:pt x="3880" y="1665"/>
-                </a:lnTo>
-                <a:lnTo>
-                  <a:pt x="3977" y="1602"/>
-                </a:lnTo>
-                <a:lnTo>
-                  <a:pt x="4074" y="1538"/>
-                </a:lnTo>
-                <a:lnTo>
-                  <a:pt x="4171" y="1471"/>
-                </a:lnTo>
-                <a:lnTo>
-                  <a:pt x="4268" y="1402"/>
-                </a:lnTo>
-                <a:lnTo>
-                  <a:pt x="4365" y="1330"/>
-                </a:lnTo>
-                <a:lnTo>
-                  <a:pt x="4462" y="1256"/>
-                </a:lnTo>
-                <a:lnTo>
-                  <a:pt x="4559" y="1178"/>
-                </a:lnTo>
-                <a:lnTo>
-                  <a:pt x="4656" y="1098"/>
-                </a:lnTo>
-                <a:lnTo>
-                  <a:pt x="4753" y="1015"/>
-                </a:lnTo>
-                <a:lnTo>
-                  <a:pt x="4850" y="929"/>
-                </a:lnTo>
-                <a:lnTo>
-                  <a:pt x="4947" y="840"/>
-                </a:lnTo>
-                <a:lnTo>
-                  <a:pt x="5044" y="748"/>
-                </a:lnTo>
-                <a:lnTo>
-                  <a:pt x="5141" y="652"/>
-                </a:lnTo>
-                <a:lnTo>
-                  <a:pt x="5238" y="553"/>
-                </a:lnTo>
-                <a:lnTo>
-                  <a:pt x="5335" y="450"/>
-                </a:lnTo>
-                <a:lnTo>
-                  <a:pt x="5432" y="344"/>
-                </a:lnTo>
-                <a:lnTo>
-                  <a:pt x="5529" y="233"/>
-                </a:lnTo>
-                <a:lnTo>
-                  <a:pt x="5626" y="119"/>
+                  <a:pt x="97" y="2995"/>
+                </a:lnTo>
+                <a:lnTo>
+                  <a:pt x="194" y="2980"/>
+                </a:lnTo>
+                <a:lnTo>
+                  <a:pt x="291" y="2965"/>
+                </a:lnTo>
+                <a:lnTo>
+                  <a:pt x="388" y="2949"/>
+                </a:lnTo>
+                <a:lnTo>
+                  <a:pt x="485" y="2932"/>
+                </a:lnTo>
+                <a:lnTo>
+                  <a:pt x="582" y="2915"/>
+                </a:lnTo>
+                <a:lnTo>
+                  <a:pt x="679" y="2897"/>
+                </a:lnTo>
+                <a:lnTo>
+                  <a:pt x="776" y="2878"/>
+                </a:lnTo>
+                <a:lnTo>
+                  <a:pt x="873" y="2859"/>
+                </a:lnTo>
+                <a:lnTo>
+                  <a:pt x="970" y="2839"/>
+                </a:lnTo>
+                <a:lnTo>
+                  <a:pt x="1067" y="2818"/>
+                </a:lnTo>
+                <a:lnTo>
+                  <a:pt x="1165" y="2797"/>
+                </a:lnTo>
+                <a:lnTo>
+                  <a:pt x="1262" y="2774"/>
+                </a:lnTo>
+                <a:lnTo>
+                  <a:pt x="1359" y="2751"/>
+                </a:lnTo>
+                <a:lnTo>
+                  <a:pt x="1456" y="2727"/>
+                </a:lnTo>
+                <a:lnTo>
+                  <a:pt x="1553" y="2702"/>
+                </a:lnTo>
+                <a:lnTo>
+                  <a:pt x="1650" y="2676"/>
+                </a:lnTo>
+                <a:lnTo>
+                  <a:pt x="1747" y="2649"/>
+                </a:lnTo>
+                <a:lnTo>
+                  <a:pt x="1844" y="2621"/>
+                </a:lnTo>
+                <a:lnTo>
+                  <a:pt x="1941" y="2592"/>
+                </a:lnTo>
+                <a:lnTo>
+                  <a:pt x="2038" y="2562"/>
+                </a:lnTo>
+                <a:lnTo>
+                  <a:pt x="2134" y="2531"/>
+                </a:lnTo>
+                <a:lnTo>
+                  <a:pt x="2231" y="2498"/>
+                </a:lnTo>
+                <a:lnTo>
+                  <a:pt x="2329" y="2465"/>
+                </a:lnTo>
+                <a:lnTo>
+                  <a:pt x="2426" y="2430"/>
+                </a:lnTo>
+                <a:lnTo>
+                  <a:pt x="2522" y="2394"/>
+                </a:lnTo>
+                <a:lnTo>
+                  <a:pt x="2619" y="2356"/>
+                </a:lnTo>
+                <a:lnTo>
+                  <a:pt x="2716" y="2317"/>
+                </a:lnTo>
+                <a:lnTo>
+                  <a:pt x="2813" y="2276"/>
+                </a:lnTo>
+                <a:lnTo>
+                  <a:pt x="2910" y="2234"/>
+                </a:lnTo>
+                <a:lnTo>
+                  <a:pt x="3007" y="2191"/>
+                </a:lnTo>
+                <a:lnTo>
+                  <a:pt x="3104" y="2145"/>
+                </a:lnTo>
+                <a:lnTo>
+                  <a:pt x="3201" y="2098"/>
+                </a:lnTo>
+                <a:lnTo>
+                  <a:pt x="3298" y="2049"/>
+                </a:lnTo>
+                <a:lnTo>
+                  <a:pt x="3395" y="1999"/>
+                </a:lnTo>
+                <a:lnTo>
+                  <a:pt x="3492" y="1946"/>
+                </a:lnTo>
+                <a:lnTo>
+                  <a:pt x="3589" y="1892"/>
+                </a:lnTo>
+                <a:lnTo>
+                  <a:pt x="3686" y="1835"/>
+                </a:lnTo>
+                <a:lnTo>
+                  <a:pt x="3783" y="1776"/>
+                </a:lnTo>
+                <a:lnTo>
+                  <a:pt x="3880" y="1715"/>
+                </a:lnTo>
+                <a:lnTo>
+                  <a:pt x="3977" y="1652"/>
+                </a:lnTo>
+                <a:lnTo>
+                  <a:pt x="4074" y="1586"/>
+                </a:lnTo>
+                <a:lnTo>
+                  <a:pt x="4171" y="1518"/>
+                </a:lnTo>
+                <a:lnTo>
+                  <a:pt x="4268" y="1446"/>
+                </a:lnTo>
+                <a:lnTo>
+                  <a:pt x="4365" y="1373"/>
+                </a:lnTo>
+                <a:lnTo>
+                  <a:pt x="4462" y="1297"/>
+                </a:lnTo>
+                <a:lnTo>
+                  <a:pt x="4559" y="1218"/>
+                </a:lnTo>
+                <a:lnTo>
+                  <a:pt x="4656" y="1135"/>
+                </a:lnTo>
+                <a:lnTo>
+                  <a:pt x="4753" y="1050"/>
+                </a:lnTo>
+                <a:lnTo>
+                  <a:pt x="4850" y="962"/>
+                </a:lnTo>
+                <a:lnTo>
+                  <a:pt x="4947" y="870"/>
+                </a:lnTo>
+                <a:lnTo>
+                  <a:pt x="5044" y="775"/>
+                </a:lnTo>
+                <a:lnTo>
+                  <a:pt x="5141" y="676"/>
+                </a:lnTo>
+                <a:lnTo>
+                  <a:pt x="5238" y="573"/>
+                </a:lnTo>
+                <a:lnTo>
+                  <a:pt x="5335" y="467"/>
+                </a:lnTo>
+                <a:lnTo>
+                  <a:pt x="5432" y="357"/>
+                </a:lnTo>
+                <a:lnTo>
+                  <a:pt x="5529" y="242"/>
+                </a:lnTo>
+                <a:lnTo>
+                  <a:pt x="5626" y="123"/>
                 </a:lnTo>
                 <a:lnTo>
                   <a:pt x="5723" y="0"/>
@@ -7127,8 +7133,8 @@
         </p:nvSpPr>
         <p:spPr>
           <a:xfrm>
-            <a:off x="628920" y="4313880"/>
-            <a:ext cx="2060280" cy="893520"/>
+            <a:off x="628920" y="4308120"/>
+            <a:ext cx="2060280" cy="898920"/>
           </a:xfrm>
           <a:custGeom>
             <a:avLst/>
@@ -7136,183 +7142,183 @@
             <a:ahLst/>
             <a:rect l="0" t="0" r="r" b="b"/>
             <a:pathLst>
-              <a:path fill="none" w="5723" h="2482">
+              <a:path fill="none" w="5723" h="2497">
                 <a:moveTo>
-                  <a:pt x="0" y="2482"/>
+                  <a:pt x="0" y="2497"/>
                 </a:moveTo>
                 <a:lnTo>
-                  <a:pt x="97" y="2461"/>
-                </a:lnTo>
-                <a:lnTo>
-                  <a:pt x="194" y="2439"/>
-                </a:lnTo>
-                <a:lnTo>
-                  <a:pt x="291" y="2417"/>
-                </a:lnTo>
-                <a:lnTo>
-                  <a:pt x="388" y="2395"/>
-                </a:lnTo>
-                <a:lnTo>
-                  <a:pt x="485" y="2372"/>
-                </a:lnTo>
-                <a:lnTo>
-                  <a:pt x="582" y="2348"/>
-                </a:lnTo>
-                <a:lnTo>
-                  <a:pt x="679" y="2324"/>
-                </a:lnTo>
-                <a:lnTo>
-                  <a:pt x="776" y="2300"/>
-                </a:lnTo>
-                <a:lnTo>
-                  <a:pt x="873" y="2275"/>
-                </a:lnTo>
-                <a:lnTo>
-                  <a:pt x="970" y="2249"/>
-                </a:lnTo>
-                <a:lnTo>
-                  <a:pt x="1067" y="2223"/>
-                </a:lnTo>
-                <a:lnTo>
-                  <a:pt x="1165" y="2197"/>
-                </a:lnTo>
-                <a:lnTo>
-                  <a:pt x="1262" y="2170"/>
-                </a:lnTo>
-                <a:lnTo>
-                  <a:pt x="1359" y="2142"/>
-                </a:lnTo>
-                <a:lnTo>
-                  <a:pt x="1456" y="2113"/>
-                </a:lnTo>
-                <a:lnTo>
-                  <a:pt x="1553" y="2084"/>
-                </a:lnTo>
-                <a:lnTo>
-                  <a:pt x="1650" y="2054"/>
-                </a:lnTo>
-                <a:lnTo>
-                  <a:pt x="1747" y="2024"/>
-                </a:lnTo>
-                <a:lnTo>
-                  <a:pt x="1844" y="1993"/>
-                </a:lnTo>
-                <a:lnTo>
-                  <a:pt x="1941" y="1961"/>
-                </a:lnTo>
-                <a:lnTo>
-                  <a:pt x="2038" y="1929"/>
-                </a:lnTo>
-                <a:lnTo>
-                  <a:pt x="2134" y="1896"/>
-                </a:lnTo>
-                <a:lnTo>
-                  <a:pt x="2231" y="1862"/>
-                </a:lnTo>
-                <a:lnTo>
-                  <a:pt x="2329" y="1828"/>
-                </a:lnTo>
-                <a:lnTo>
-                  <a:pt x="2426" y="1792"/>
-                </a:lnTo>
-                <a:lnTo>
-                  <a:pt x="2522" y="1756"/>
-                </a:lnTo>
-                <a:lnTo>
-                  <a:pt x="2619" y="1719"/>
-                </a:lnTo>
-                <a:lnTo>
-                  <a:pt x="2716" y="1682"/>
-                </a:lnTo>
-                <a:lnTo>
-                  <a:pt x="2813" y="1642"/>
-                </a:lnTo>
-                <a:lnTo>
-                  <a:pt x="2910" y="1603"/>
-                </a:lnTo>
-                <a:lnTo>
-                  <a:pt x="3007" y="1563"/>
-                </a:lnTo>
-                <a:lnTo>
-                  <a:pt x="3104" y="1522"/>
-                </a:lnTo>
-                <a:lnTo>
-                  <a:pt x="3201" y="1480"/>
-                </a:lnTo>
-                <a:lnTo>
-                  <a:pt x="3298" y="1437"/>
-                </a:lnTo>
-                <a:lnTo>
-                  <a:pt x="3395" y="1393"/>
-                </a:lnTo>
-                <a:lnTo>
-                  <a:pt x="3492" y="1348"/>
-                </a:lnTo>
-                <a:lnTo>
-                  <a:pt x="3589" y="1302"/>
-                </a:lnTo>
-                <a:lnTo>
-                  <a:pt x="3686" y="1256"/>
-                </a:lnTo>
-                <a:lnTo>
-                  <a:pt x="3783" y="1208"/>
-                </a:lnTo>
-                <a:lnTo>
-                  <a:pt x="3880" y="1159"/>
-                </a:lnTo>
-                <a:lnTo>
-                  <a:pt x="3977" y="1109"/>
-                </a:lnTo>
-                <a:lnTo>
-                  <a:pt x="4074" y="1058"/>
-                </a:lnTo>
-                <a:lnTo>
-                  <a:pt x="4171" y="1006"/>
-                </a:lnTo>
-                <a:lnTo>
-                  <a:pt x="4268" y="953"/>
-                </a:lnTo>
-                <a:lnTo>
-                  <a:pt x="4365" y="898"/>
-                </a:lnTo>
-                <a:lnTo>
-                  <a:pt x="4462" y="843"/>
-                </a:lnTo>
-                <a:lnTo>
-                  <a:pt x="4559" y="786"/>
-                </a:lnTo>
-                <a:lnTo>
-                  <a:pt x="4656" y="728"/>
-                </a:lnTo>
-                <a:lnTo>
-                  <a:pt x="4753" y="669"/>
-                </a:lnTo>
-                <a:lnTo>
-                  <a:pt x="4850" y="608"/>
-                </a:lnTo>
-                <a:lnTo>
-                  <a:pt x="4947" y="546"/>
-                </a:lnTo>
-                <a:lnTo>
-                  <a:pt x="5044" y="483"/>
-                </a:lnTo>
-                <a:lnTo>
-                  <a:pt x="5141" y="418"/>
-                </a:lnTo>
-                <a:lnTo>
-                  <a:pt x="5238" y="352"/>
-                </a:lnTo>
-                <a:lnTo>
-                  <a:pt x="5335" y="285"/>
-                </a:lnTo>
-                <a:lnTo>
-                  <a:pt x="5432" y="216"/>
-                </a:lnTo>
-                <a:lnTo>
-                  <a:pt x="5529" y="145"/>
-                </a:lnTo>
-                <a:lnTo>
-                  <a:pt x="5626" y="73"/>
+                  <a:pt x="97" y="2476"/>
+                </a:lnTo>
+                <a:lnTo>
+                  <a:pt x="194" y="2455"/>
+                </a:lnTo>
+                <a:lnTo>
+                  <a:pt x="291" y="2433"/>
+                </a:lnTo>
+                <a:lnTo>
+                  <a:pt x="388" y="2411"/>
+                </a:lnTo>
+                <a:lnTo>
+                  <a:pt x="485" y="2388"/>
+                </a:lnTo>
+                <a:lnTo>
+                  <a:pt x="582" y="2365"/>
+                </a:lnTo>
+                <a:lnTo>
+                  <a:pt x="679" y="2341"/>
+                </a:lnTo>
+                <a:lnTo>
+                  <a:pt x="776" y="2316"/>
+                </a:lnTo>
+                <a:lnTo>
+                  <a:pt x="873" y="2291"/>
+                </a:lnTo>
+                <a:lnTo>
+                  <a:pt x="970" y="2266"/>
+                </a:lnTo>
+                <a:lnTo>
+                  <a:pt x="1067" y="2240"/>
+                </a:lnTo>
+                <a:lnTo>
+                  <a:pt x="1165" y="2213"/>
+                </a:lnTo>
+                <a:lnTo>
+                  <a:pt x="1262" y="2186"/>
+                </a:lnTo>
+                <a:lnTo>
+                  <a:pt x="1359" y="2158"/>
+                </a:lnTo>
+                <a:lnTo>
+                  <a:pt x="1456" y="2130"/>
+                </a:lnTo>
+                <a:lnTo>
+                  <a:pt x="1553" y="2101"/>
+                </a:lnTo>
+                <a:lnTo>
+                  <a:pt x="1650" y="2071"/>
+                </a:lnTo>
+                <a:lnTo>
+                  <a:pt x="1747" y="2040"/>
+                </a:lnTo>
+                <a:lnTo>
+                  <a:pt x="1844" y="2009"/>
+                </a:lnTo>
+                <a:lnTo>
+                  <a:pt x="1941" y="1978"/>
+                </a:lnTo>
+                <a:lnTo>
+                  <a:pt x="2038" y="1945"/>
+                </a:lnTo>
+                <a:lnTo>
+                  <a:pt x="2134" y="1912"/>
+                </a:lnTo>
+                <a:lnTo>
+                  <a:pt x="2231" y="1878"/>
+                </a:lnTo>
+                <a:lnTo>
+                  <a:pt x="2329" y="1843"/>
+                </a:lnTo>
+                <a:lnTo>
+                  <a:pt x="2426" y="1808"/>
+                </a:lnTo>
+                <a:lnTo>
+                  <a:pt x="2522" y="1772"/>
+                </a:lnTo>
+                <a:lnTo>
+                  <a:pt x="2619" y="1734"/>
+                </a:lnTo>
+                <a:lnTo>
+                  <a:pt x="2716" y="1696"/>
+                </a:lnTo>
+                <a:lnTo>
+                  <a:pt x="2813" y="1657"/>
+                </a:lnTo>
+                <a:lnTo>
+                  <a:pt x="2910" y="1618"/>
+                </a:lnTo>
+                <a:lnTo>
+                  <a:pt x="3007" y="1577"/>
+                </a:lnTo>
+                <a:lnTo>
+                  <a:pt x="3104" y="1536"/>
+                </a:lnTo>
+                <a:lnTo>
+                  <a:pt x="3201" y="1494"/>
+                </a:lnTo>
+                <a:lnTo>
+                  <a:pt x="3298" y="1451"/>
+                </a:lnTo>
+                <a:lnTo>
+                  <a:pt x="3395" y="1407"/>
+                </a:lnTo>
+                <a:lnTo>
+                  <a:pt x="3492" y="1362"/>
+                </a:lnTo>
+                <a:lnTo>
+                  <a:pt x="3589" y="1316"/>
+                </a:lnTo>
+                <a:lnTo>
+                  <a:pt x="3686" y="1268"/>
+                </a:lnTo>
+                <a:lnTo>
+                  <a:pt x="3783" y="1220"/>
+                </a:lnTo>
+                <a:lnTo>
+                  <a:pt x="3880" y="1171"/>
+                </a:lnTo>
+                <a:lnTo>
+                  <a:pt x="3977" y="1121"/>
+                </a:lnTo>
+                <a:lnTo>
+                  <a:pt x="4074" y="1070"/>
+                </a:lnTo>
+                <a:lnTo>
+                  <a:pt x="4171" y="1017"/>
+                </a:lnTo>
+                <a:lnTo>
+                  <a:pt x="4268" y="963"/>
+                </a:lnTo>
+                <a:lnTo>
+                  <a:pt x="4365" y="908"/>
+                </a:lnTo>
+                <a:lnTo>
+                  <a:pt x="4462" y="853"/>
+                </a:lnTo>
+                <a:lnTo>
+                  <a:pt x="4559" y="795"/>
+                </a:lnTo>
+                <a:lnTo>
+                  <a:pt x="4656" y="737"/>
+                </a:lnTo>
+                <a:lnTo>
+                  <a:pt x="4753" y="677"/>
+                </a:lnTo>
+                <a:lnTo>
+                  <a:pt x="4850" y="616"/>
+                </a:lnTo>
+                <a:lnTo>
+                  <a:pt x="4947" y="553"/>
+                </a:lnTo>
+                <a:lnTo>
+                  <a:pt x="5044" y="489"/>
+                </a:lnTo>
+                <a:lnTo>
+                  <a:pt x="5141" y="424"/>
+                </a:lnTo>
+                <a:lnTo>
+                  <a:pt x="5238" y="357"/>
+                </a:lnTo>
+                <a:lnTo>
+                  <a:pt x="5335" y="289"/>
+                </a:lnTo>
+                <a:lnTo>
+                  <a:pt x="5432" y="219"/>
+                </a:lnTo>
+                <a:lnTo>
+                  <a:pt x="5529" y="148"/>
+                </a:lnTo>
+                <a:lnTo>
+                  <a:pt x="5626" y="75"/>
                 </a:lnTo>
                 <a:lnTo>
                   <a:pt x="5723" y="0"/>
@@ -7351,8 +7357,8 @@
         </p:nvSpPr>
         <p:spPr>
           <a:xfrm>
-            <a:off x="628920" y="4281120"/>
-            <a:ext cx="2060280" cy="371880"/>
+            <a:off x="628920" y="4285080"/>
+            <a:ext cx="2060280" cy="298080"/>
           </a:xfrm>
           <a:custGeom>
             <a:avLst/>
@@ -7360,147 +7366,138 @@
             <a:ahLst/>
             <a:rect l="0" t="0" r="r" b="b"/>
             <a:pathLst>
-              <a:path fill="none" w="5723" h="1033">
+              <a:path fill="none" w="5723" h="828">
                 <a:moveTo>
-                  <a:pt x="0" y="1033"/>
+                  <a:pt x="0" y="828"/>
                 </a:moveTo>
                 <a:lnTo>
-                  <a:pt x="194" y="1003"/>
-                </a:lnTo>
-                <a:lnTo>
-                  <a:pt x="291" y="988"/>
-                </a:lnTo>
-                <a:lnTo>
-                  <a:pt x="388" y="973"/>
-                </a:lnTo>
-                <a:lnTo>
-                  <a:pt x="485" y="958"/>
-                </a:lnTo>
-                <a:lnTo>
-                  <a:pt x="679" y="928"/>
-                </a:lnTo>
-                <a:lnTo>
-                  <a:pt x="776" y="912"/>
-                </a:lnTo>
-                <a:lnTo>
-                  <a:pt x="873" y="897"/>
-                </a:lnTo>
-                <a:lnTo>
-                  <a:pt x="970" y="881"/>
-                </a:lnTo>
-                <a:lnTo>
-                  <a:pt x="1067" y="866"/>
-                </a:lnTo>
-                <a:lnTo>
-                  <a:pt x="1165" y="850"/>
-                </a:lnTo>
-                <a:lnTo>
-                  <a:pt x="1262" y="834"/>
-                </a:lnTo>
-                <a:lnTo>
-                  <a:pt x="1359" y="818"/>
-                </a:lnTo>
-                <a:lnTo>
-                  <a:pt x="1553" y="786"/>
-                </a:lnTo>
-                <a:lnTo>
-                  <a:pt x="1650" y="770"/>
-                </a:lnTo>
-                <a:lnTo>
-                  <a:pt x="1844" y="738"/>
-                </a:lnTo>
-                <a:lnTo>
-                  <a:pt x="1941" y="721"/>
-                </a:lnTo>
-                <a:lnTo>
-                  <a:pt x="2038" y="705"/>
-                </a:lnTo>
-                <a:lnTo>
-                  <a:pt x="2134" y="688"/>
-                </a:lnTo>
-                <a:lnTo>
-                  <a:pt x="2231" y="672"/>
-                </a:lnTo>
-                <a:lnTo>
-                  <a:pt x="2329" y="655"/>
-                </a:lnTo>
-                <a:lnTo>
-                  <a:pt x="2426" y="638"/>
-                </a:lnTo>
-                <a:lnTo>
-                  <a:pt x="2522" y="621"/>
-                </a:lnTo>
-                <a:lnTo>
-                  <a:pt x="2619" y="604"/>
-                </a:lnTo>
-                <a:lnTo>
-                  <a:pt x="2813" y="569"/>
-                </a:lnTo>
-                <a:lnTo>
-                  <a:pt x="2910" y="552"/>
-                </a:lnTo>
-                <a:lnTo>
-                  <a:pt x="3007" y="534"/>
-                </a:lnTo>
-                <a:lnTo>
-                  <a:pt x="3201" y="499"/>
-                </a:lnTo>
-                <a:lnTo>
-                  <a:pt x="3298" y="481"/>
-                </a:lnTo>
-                <a:lnTo>
-                  <a:pt x="3395" y="463"/>
-                </a:lnTo>
-                <a:lnTo>
-                  <a:pt x="3589" y="427"/>
-                </a:lnTo>
-                <a:lnTo>
-                  <a:pt x="3686" y="409"/>
-                </a:lnTo>
-                <a:lnTo>
-                  <a:pt x="3783" y="390"/>
-                </a:lnTo>
-                <a:lnTo>
-                  <a:pt x="3880" y="372"/>
-                </a:lnTo>
-                <a:lnTo>
-                  <a:pt x="4074" y="335"/>
-                </a:lnTo>
-                <a:lnTo>
-                  <a:pt x="4171" y="316"/>
-                </a:lnTo>
-                <a:lnTo>
-                  <a:pt x="4268" y="297"/>
-                </a:lnTo>
-                <a:lnTo>
-                  <a:pt x="4462" y="259"/>
-                </a:lnTo>
-                <a:lnTo>
-                  <a:pt x="4559" y="239"/>
-                </a:lnTo>
-                <a:lnTo>
-                  <a:pt x="4656" y="220"/>
-                </a:lnTo>
-                <a:lnTo>
-                  <a:pt x="4850" y="181"/>
-                </a:lnTo>
-                <a:lnTo>
-                  <a:pt x="4947" y="161"/>
-                </a:lnTo>
-                <a:lnTo>
-                  <a:pt x="5044" y="142"/>
-                </a:lnTo>
-                <a:lnTo>
-                  <a:pt x="5238" y="102"/>
-                </a:lnTo>
-                <a:lnTo>
-                  <a:pt x="5335" y="81"/>
-                </a:lnTo>
-                <a:lnTo>
-                  <a:pt x="5432" y="61"/>
-                </a:lnTo>
-                <a:lnTo>
-                  <a:pt x="5529" y="41"/>
+                  <a:pt x="194" y="803"/>
+                </a:lnTo>
+                <a:lnTo>
+                  <a:pt x="388" y="779"/>
+                </a:lnTo>
+                <a:lnTo>
+                  <a:pt x="485" y="766"/>
+                </a:lnTo>
+                <a:lnTo>
+                  <a:pt x="679" y="741"/>
+                </a:lnTo>
+                <a:lnTo>
+                  <a:pt x="776" y="728"/>
+                </a:lnTo>
+                <a:lnTo>
+                  <a:pt x="873" y="716"/>
+                </a:lnTo>
+                <a:lnTo>
+                  <a:pt x="1165" y="677"/>
+                </a:lnTo>
+                <a:lnTo>
+                  <a:pt x="1262" y="664"/>
+                </a:lnTo>
+                <a:lnTo>
+                  <a:pt x="1359" y="651"/>
+                </a:lnTo>
+                <a:lnTo>
+                  <a:pt x="1553" y="625"/>
+                </a:lnTo>
+                <a:lnTo>
+                  <a:pt x="1650" y="612"/>
+                </a:lnTo>
+                <a:lnTo>
+                  <a:pt x="1747" y="599"/>
+                </a:lnTo>
+                <a:lnTo>
+                  <a:pt x="1844" y="586"/>
+                </a:lnTo>
+                <a:lnTo>
+                  <a:pt x="1941" y="572"/>
+                </a:lnTo>
+                <a:lnTo>
+                  <a:pt x="2038" y="559"/>
+                </a:lnTo>
+                <a:lnTo>
+                  <a:pt x="2134" y="545"/>
+                </a:lnTo>
+                <a:lnTo>
+                  <a:pt x="2329" y="518"/>
+                </a:lnTo>
+                <a:lnTo>
+                  <a:pt x="2426" y="505"/>
+                </a:lnTo>
+                <a:lnTo>
+                  <a:pt x="2522" y="491"/>
+                </a:lnTo>
+                <a:lnTo>
+                  <a:pt x="2716" y="463"/>
+                </a:lnTo>
+                <a:lnTo>
+                  <a:pt x="2813" y="449"/>
+                </a:lnTo>
+                <a:lnTo>
+                  <a:pt x="2910" y="435"/>
+                </a:lnTo>
+                <a:lnTo>
+                  <a:pt x="3007" y="421"/>
+                </a:lnTo>
+                <a:lnTo>
+                  <a:pt x="3104" y="407"/>
+                </a:lnTo>
+                <a:lnTo>
+                  <a:pt x="3201" y="393"/>
+                </a:lnTo>
+                <a:lnTo>
+                  <a:pt x="3298" y="379"/>
+                </a:lnTo>
+                <a:lnTo>
+                  <a:pt x="3395" y="365"/>
+                </a:lnTo>
+                <a:lnTo>
+                  <a:pt x="3492" y="350"/>
+                </a:lnTo>
+                <a:lnTo>
+                  <a:pt x="3686" y="321"/>
+                </a:lnTo>
+                <a:lnTo>
+                  <a:pt x="3783" y="307"/>
+                </a:lnTo>
+                <a:lnTo>
+                  <a:pt x="3977" y="278"/>
+                </a:lnTo>
+                <a:lnTo>
+                  <a:pt x="4074" y="263"/>
+                </a:lnTo>
+                <a:lnTo>
+                  <a:pt x="4171" y="248"/>
+                </a:lnTo>
+                <a:lnTo>
+                  <a:pt x="4365" y="218"/>
+                </a:lnTo>
+                <a:lnTo>
+                  <a:pt x="4462" y="203"/>
+                </a:lnTo>
+                <a:lnTo>
+                  <a:pt x="4559" y="188"/>
+                </a:lnTo>
+                <a:lnTo>
+                  <a:pt x="4753" y="158"/>
+                </a:lnTo>
+                <a:lnTo>
+                  <a:pt x="4850" y="142"/>
+                </a:lnTo>
+                <a:lnTo>
+                  <a:pt x="4947" y="127"/>
+                </a:lnTo>
+                <a:lnTo>
+                  <a:pt x="5044" y="112"/>
+                </a:lnTo>
+                <a:lnTo>
+                  <a:pt x="5335" y="64"/>
+                </a:lnTo>
+                <a:lnTo>
+                  <a:pt x="5432" y="48"/>
+                </a:lnTo>
+                <a:lnTo>
+                  <a:pt x="5626" y="16"/>
                 </a:lnTo>
                 <a:lnTo>
                   <a:pt x="5723" y="0"/>
@@ -7630,7 +7627,7 @@
         </p:nvSpPr>
         <p:spPr>
           <a:xfrm>
-            <a:off x="342000" y="5501880"/>
+            <a:off x="342000" y="5496480"/>
             <a:ext cx="142560" cy="102600"/>
           </a:xfrm>
           <a:prstGeom prst="rect">
@@ -7678,7 +7675,7 @@
         </p:nvSpPr>
         <p:spPr>
           <a:xfrm>
-            <a:off x="342000" y="4947120"/>
+            <a:off x="342000" y="4945320"/>
             <a:ext cx="142560" cy="102600"/>
           </a:xfrm>
           <a:prstGeom prst="rect">
@@ -7726,7 +7723,7 @@
         </p:nvSpPr>
         <p:spPr>
           <a:xfrm>
-            <a:off x="342000" y="4392720"/>
+            <a:off x="342000" y="4393800"/>
             <a:ext cx="142560" cy="102600"/>
           </a:xfrm>
           <a:prstGeom prst="rect">
@@ -7774,7 +7771,7 @@
         </p:nvSpPr>
         <p:spPr>
           <a:xfrm>
-            <a:off x="494280" y="5552280"/>
+            <a:off x="494280" y="5547240"/>
             <a:ext cx="31680" cy="0"/>
           </a:xfrm>
           <a:prstGeom prst="line">
@@ -7817,7 +7814,7 @@
         </p:nvSpPr>
         <p:spPr>
           <a:xfrm>
-            <a:off x="494280" y="4997880"/>
+            <a:off x="494280" y="4995720"/>
             <a:ext cx="31680" cy="0"/>
           </a:xfrm>
           <a:prstGeom prst="line">
@@ -7860,7 +7857,7 @@
         </p:nvSpPr>
         <p:spPr>
           <a:xfrm>
-            <a:off x="494280" y="4443120"/>
+            <a:off x="494280" y="4444200"/>
             <a:ext cx="31680" cy="0"/>
           </a:xfrm>
           <a:prstGeom prst="line">
@@ -7903,7 +7900,7 @@
         </p:nvSpPr>
         <p:spPr>
           <a:xfrm>
-            <a:off x="494280" y="3888720"/>
+            <a:off x="494280" y="3893040"/>
             <a:ext cx="31680" cy="0"/>
           </a:xfrm>
           <a:prstGeom prst="line">
@@ -8118,7 +8115,7 @@
         </p:nvSpPr>
         <p:spPr>
           <a:xfrm flipV="1">
-            <a:off x="2226600" y="5556960"/>
+            <a:off x="2226240" y="5556960"/>
             <a:ext cx="0" cy="31680"/>
           </a:xfrm>
           <a:prstGeom prst="line">
@@ -8161,7 +8158,7 @@
         </p:nvSpPr>
         <p:spPr>
           <a:xfrm flipV="1">
-            <a:off x="2789280" y="5556960"/>
+            <a:off x="2788920" y="5556960"/>
             <a:ext cx="0" cy="31680"/>
           </a:xfrm>
           <a:prstGeom prst="line">
@@ -8204,7 +8201,7 @@
         </p:nvSpPr>
         <p:spPr>
           <a:xfrm>
-            <a:off x="342000" y="3837960"/>
+            <a:off x="342000" y="3842280"/>
             <a:ext cx="142560" cy="102600"/>
           </a:xfrm>
           <a:prstGeom prst="rect">
@@ -8444,7 +8441,7 @@
         </p:nvSpPr>
         <p:spPr>
           <a:xfrm>
-            <a:off x="2725920" y="5601240"/>
+            <a:off x="2725560" y="5601240"/>
             <a:ext cx="142560" cy="102600"/>
           </a:xfrm>
           <a:prstGeom prst="rect">
@@ -9128,7 +9125,7 @@
                 <a:latin typeface="Arial"/>
                 <a:ea typeface="Arial"/>
               </a:rPr>
-              <a:t>1,114 visits/yr</a:t>
+              <a:t>1,163 visits/yr</a:t>
             </a:r>
             <a:endParaRPr lang="en-US" sz="900" b="0" u="none" strike="noStrike">
               <a:solidFill>
@@ -9224,7 +9221,7 @@
                 <a:latin typeface="Arial"/>
                 <a:ea typeface="Arial"/>
               </a:rPr>
-              <a:t>one SD of effort multiplies annual visits by 7.7</a:t>
+              <a:t>one SD of effort multiplies annual visits by 7.9</a:t>
             </a:r>
             <a:endParaRPr lang="en-US" sz="920" b="0" u="none" strike="noStrike">
               <a:solidFill>
@@ -9400,7 +9397,7 @@
         <p:spPr>
           <a:xfrm>
             <a:off x="4424040" y="3704040"/>
-            <a:ext cx="1144440" cy="209520"/>
+            <a:ext cx="1143360" cy="209520"/>
           </a:xfrm>
           <a:custGeom>
             <a:avLst/>
@@ -9408,15 +9405,15 @@
             <a:ahLst/>
             <a:rect l="0" t="0" r="r" b="b"/>
             <a:pathLst>
-              <a:path w="3179" h="582">
+              <a:path w="3176" h="582">
                 <a:moveTo>
                   <a:pt x="0" y="0"/>
                 </a:moveTo>
                 <a:lnTo>
-                  <a:pt x="3179" y="0"/>
-                </a:lnTo>
-                <a:lnTo>
-                  <a:pt x="3179" y="582"/>
+                  <a:pt x="3176" y="0"/>
+                </a:lnTo>
+                <a:lnTo>
+                  <a:pt x="3176" y="582"/>
                 </a:lnTo>
                 <a:lnTo>
                   <a:pt x="0" y="582"/>
@@ -9460,7 +9457,7 @@
         <p:spPr>
           <a:xfrm>
             <a:off x="4424040" y="4084200"/>
-            <a:ext cx="1057680" cy="209520"/>
+            <a:ext cx="1063800" cy="209520"/>
           </a:xfrm>
           <a:custGeom>
             <a:avLst/>
@@ -9468,15 +9465,15 @@
             <a:ahLst/>
             <a:rect l="0" t="0" r="r" b="b"/>
             <a:pathLst>
-              <a:path w="2938" h="582">
+              <a:path w="2955" h="582">
                 <a:moveTo>
                   <a:pt x="0" y="0"/>
                 </a:moveTo>
                 <a:lnTo>
-                  <a:pt x="2938" y="0"/>
-                </a:lnTo>
-                <a:lnTo>
-                  <a:pt x="2938" y="582"/>
+                  <a:pt x="2955" y="0"/>
+                </a:lnTo>
+                <a:lnTo>
+                  <a:pt x="2955" y="582"/>
                 </a:lnTo>
                 <a:lnTo>
                   <a:pt x="0" y="582"/>
@@ -9520,7 +9517,7 @@
         <p:spPr>
           <a:xfrm>
             <a:off x="4424040" y="4464360"/>
-            <a:ext cx="1705320" cy="209160"/>
+            <a:ext cx="1694880" cy="209160"/>
           </a:xfrm>
           <a:custGeom>
             <a:avLst/>
@@ -9528,15 +9525,15 @@
             <a:ahLst/>
             <a:rect l="0" t="0" r="r" b="b"/>
             <a:pathLst>
-              <a:path w="4737" h="581">
+              <a:path w="4708" h="581">
                 <a:moveTo>
                   <a:pt x="0" y="0"/>
                 </a:moveTo>
                 <a:lnTo>
-                  <a:pt x="4737" y="0"/>
-                </a:lnTo>
-                <a:lnTo>
-                  <a:pt x="4737" y="581"/>
+                  <a:pt x="4708" y="0"/>
+                </a:lnTo>
+                <a:lnTo>
+                  <a:pt x="4708" y="581"/>
                 </a:lnTo>
                 <a:lnTo>
                   <a:pt x="0" y="581"/>
@@ -9580,7 +9577,7 @@
         <p:spPr>
           <a:xfrm>
             <a:off x="4424040" y="4844160"/>
-            <a:ext cx="1039320" cy="209520"/>
+            <a:ext cx="1041480" cy="209520"/>
           </a:xfrm>
           <a:custGeom>
             <a:avLst/>
@@ -9588,15 +9585,15 @@
             <a:ahLst/>
             <a:rect l="0" t="0" r="r" b="b"/>
             <a:pathLst>
-              <a:path w="2887" h="582">
+              <a:path w="2893" h="582">
                 <a:moveTo>
                   <a:pt x="0" y="0"/>
                 </a:moveTo>
                 <a:lnTo>
-                  <a:pt x="2887" y="0"/>
-                </a:lnTo>
-                <a:lnTo>
-                  <a:pt x="2887" y="582"/>
+                  <a:pt x="2893" y="0"/>
+                </a:lnTo>
+                <a:lnTo>
+                  <a:pt x="2893" y="582"/>
                 </a:lnTo>
                 <a:lnTo>
                   <a:pt x="0" y="582"/>
@@ -9640,7 +9637,7 @@
         <p:spPr>
           <a:xfrm>
             <a:off x="4424040" y="5224320"/>
-            <a:ext cx="1071360" cy="209520"/>
+            <a:ext cx="1090800" cy="209520"/>
           </a:xfrm>
           <a:custGeom>
             <a:avLst/>
@@ -9648,15 +9645,15 @@
             <a:ahLst/>
             <a:rect l="0" t="0" r="r" b="b"/>
             <a:pathLst>
-              <a:path w="2976" h="582">
+              <a:path w="3030" h="582">
                 <a:moveTo>
                   <a:pt x="0" y="0"/>
                 </a:moveTo>
                 <a:lnTo>
-                  <a:pt x="2976" y="0"/>
-                </a:lnTo>
-                <a:lnTo>
-                  <a:pt x="2976" y="582"/>
+                  <a:pt x="3030" y="0"/>
+                </a:lnTo>
+                <a:lnTo>
+                  <a:pt x="3030" y="582"/>
                 </a:lnTo>
                 <a:lnTo>
                   <a:pt x="0" y="582"/>
@@ -9747,7 +9744,7 @@
         </p:nvSpPr>
         <p:spPr>
           <a:xfrm>
-            <a:off x="5616360" y="3758040"/>
+            <a:off x="5615280" y="3758040"/>
             <a:ext cx="254160" cy="104040"/>
           </a:xfrm>
           <a:prstGeom prst="rect">
@@ -9795,7 +9792,7 @@
         </p:nvSpPr>
         <p:spPr>
           <a:xfrm>
-            <a:off x="5529600" y="4138200"/>
+            <a:off x="5535720" y="4138200"/>
             <a:ext cx="254160" cy="104040"/>
           </a:xfrm>
           <a:prstGeom prst="rect">
@@ -9843,7 +9840,7 @@
         </p:nvSpPr>
         <p:spPr>
           <a:xfrm>
-            <a:off x="6177240" y="4518000"/>
+            <a:off x="6166800" y="4518000"/>
             <a:ext cx="254160" cy="104040"/>
           </a:xfrm>
           <a:prstGeom prst="rect">
@@ -9870,7 +9867,7 @@
                 <a:latin typeface="Arial"/>
                 <a:ea typeface="Arial"/>
               </a:rPr>
-              <a:t>x2.23</a:t>
+              <a:t>x2.22</a:t>
             </a:r>
             <a:endParaRPr lang="en-US" sz="810" b="0" u="none" strike="noStrike">
               <a:solidFill>
@@ -9891,7 +9888,7 @@
         </p:nvSpPr>
         <p:spPr>
           <a:xfrm>
-            <a:off x="5511240" y="4898160"/>
+            <a:off x="5513400" y="4898160"/>
             <a:ext cx="254160" cy="104040"/>
           </a:xfrm>
           <a:prstGeom prst="rect">
@@ -9982,7 +9979,7 @@
         </p:nvSpPr>
         <p:spPr>
           <a:xfrm>
-            <a:off x="5543280" y="5278320"/>
+            <a:off x="5562720" y="5278320"/>
             <a:ext cx="254160" cy="104040"/>
           </a:xfrm>
           <a:prstGeom prst="rect">
@@ -10009,7 +10006,7 @@
                 <a:latin typeface="Arial"/>
                 <a:ea typeface="Arial"/>
               </a:rPr>
-              <a:t>x1.40</a:t>
+              <a:t>x1.43</a:t>
             </a:r>
             <a:endParaRPr lang="en-US" sz="810" b="0" u="none" strike="noStrike">
               <a:solidFill>
@@ -10898,7 +10895,7 @@
         <p:spPr>
           <a:xfrm>
             <a:off x="4321440" y="3377880"/>
-            <a:ext cx="2290320" cy="117720"/>
+            <a:ext cx="2257560" cy="117720"/>
           </a:xfrm>
           <a:prstGeom prst="rect">
             <a:avLst/>
@@ -10924,7 +10921,7 @@
                 <a:latin typeface="Arial"/>
                 <a:ea typeface="Arial"/>
               </a:rPr>
-              <a:t> the hazard by 2.23 - more than either driver</a:t>
+              <a:t>the hazard by 2.22 - more than either driver</a:t>
             </a:r>
             <a:endParaRPr lang="en-US" sz="920" b="0" u="none" strike="noStrike">
               <a:solidFill>
